--- a/docs/poster/draft_B_journey.pptx
+++ b/docs/poster/draft_B_journey.pptx
@@ -3339,7 +3339,7 @@
                 </a:solidFill>
                 <a:latin typeface="Arial"/>
               </a:rPr>
-              <a:t>We spent six months finding out, on our own robots and our own cluster. The answer is that collection and training run alone, and judging does not.</a:t>
+              <a:t>We spent six months finding out, on our own robots and on PSC Bridges-2. The answer is that collection and training run alone, and judging does not.</a:t>
             </a:r>
           </a:p>
         </p:txBody>
@@ -3643,7 +3643,7 @@
                 </a:solidFill>
                 <a:latin typeface="Arial"/>
               </a:rPr>
-              <a:t>Figure 2.  Frames as recorded, unenhanced. Robot 241 has sent 2,259 frames at 640 x 360 and 1 Hz, the laser cart 427, and 75 of the cart's were taken in a field. None of the 2,686 is labelled. The rectangle in the down camera is the cart's fixed work-zone overlay. It is drawn on every frame, including the ones with no vegetation in them.</a:t>
+              <a:t>Figure 2.  Frames as recorded, unenhanced. Robot 241 has sent 2,238 frames at 640 x 360 and 1 Hz, the laser cart 427, and 75 of the cart's were taken in a field. None of the 2,686 is labelled. The rectangle in the down camera is the cart's fixed work-zone overlay. It is drawn on every frame, including the ones with no vegetation in them.</a:t>
             </a:r>
           </a:p>
         </p:txBody>
@@ -3685,7 +3685,7 @@
                 </a:solidFill>
                 <a:latin typeface="Arial"/>
               </a:rPr>
-              <a:t>Two ground vehicles drive our own cotton plots. Robot 241 streams frames, position and attitude; the laser cart carries the weeder and two cameras. 2,686 frames in 26 drives, 91,955 telemetry rows across nine streams, 342 m of GPS track. None of it is labelled, and the cart writes no position at all.</a:t>
+              <a:t>Two ground vehicles drive our own crop plots. Robot 241 streams frames, position and attitude; the laser cart carries the weeder and two cameras. 2,686 frames in 26 drives, 91,955 telemetry rows across nine streams, 342 m of GPS track. None of it is labelled, and the cart writes no position at all.</a:t>
             </a:r>
           </a:p>
         </p:txBody>
@@ -3903,7 +3903,7 @@
                 </a:solidFill>
                 <a:latin typeface="Arial"/>
               </a:rPr>
-              <a:t>Figure 4.  The path from a camera in a crop row to a checkpoint on the cluster. Every stage is built and has run. Two are not running today: the collector and trainer are paused after a stop-loss on 2026-08-29, and the supervisor is advisory, so nothing it says is applied to the loop.</a:t>
+              <a:t>Figure 4.  The path as built, from a camera in a crop row to a checkpoint on the cluster. Every stage has run. Three qualifications ride on it. The collector and trainer are paused after a stop-loss on 2026-08-29. The supervisor is advisory and nothing it says is applied. And the last link is not closed: no robot frame has entered training, because none of them is labelled yet.</a:t>
             </a:r>
           </a:p>
         </p:txBody>
@@ -4281,7 +4281,7 @@
         <p:spPr>
           <a:xfrm>
             <a:off x="32552640" y="12757912"/>
-            <a:ext cx="4879238" cy="365760"/>
+            <a:ext cx="4030675" cy="365760"/>
           </a:xfrm>
           <a:prstGeom prst="rect">
             <a:avLst/>
@@ -4322,8 +4322,8 @@
         </p:nvSpPr>
         <p:spPr>
           <a:xfrm>
-            <a:off x="37431878" y="12757912"/>
-            <a:ext cx="2863900" cy="365760"/>
+            <a:off x="36583315" y="12757912"/>
+            <a:ext cx="2227478" cy="365760"/>
           </a:xfrm>
           <a:prstGeom prst="rect">
             <a:avLst/>
@@ -4364,8 +4364,8 @@
         </p:nvSpPr>
         <p:spPr>
           <a:xfrm>
-            <a:off x="40295779" y="12757912"/>
-            <a:ext cx="2863900" cy="365760"/>
+            <a:off x="38810793" y="12757912"/>
+            <a:ext cx="2227478" cy="365760"/>
           </a:xfrm>
           <a:prstGeom prst="rect">
             <a:avLst/>
@@ -4400,7 +4400,49 @@
       </p:sp>
       <p:sp>
         <p:nvSpPr>
-          <p:cNvPr id="35" name="Rectangle 34"/>
+          <p:cNvPr id="35" name="TextBox 34"/>
+          <p:cNvSpPr txBox="1"/>
+          <p:nvPr/>
+        </p:nvSpPr>
+        <p:spPr>
+          <a:xfrm>
+            <a:off x="41038272" y="12757912"/>
+            <a:ext cx="2121408" cy="365760"/>
+          </a:xfrm>
+          <a:prstGeom prst="rect">
+            <a:avLst/>
+          </a:prstGeom>
+          <a:noFill/>
+        </p:spPr>
+        <p:txBody>
+          <a:bodyPr wrap="square" lIns="0" rIns="0" tIns="0" bIns="0">
+            <a:spAutoFit/>
+          </a:bodyPr>
+          <a:lstStyle/>
+          <a:p>
+            <a:pPr algn="r">
+              <a:lnSpc>
+                <a:spcPct val="100000"/>
+              </a:lnSpc>
+              <a:spcAft>
+                <a:spcPts val="0"/>
+              </a:spcAft>
+            </a:pPr>
+            <a:r>
+              <a:rPr sz="1550" b="1">
+                <a:solidFill>
+                  <a:srgbClr val="1E293B"/>
+                </a:solidFill>
+                <a:latin typeface="Arial"/>
+              </a:rPr>
+              <a:t>incidents</a:t>
+            </a:r>
+          </a:p>
+        </p:txBody>
+      </p:sp>
+      <p:sp>
+        <p:nvSpPr>
+          <p:cNvPr id="36" name="Rectangle 35"/>
           <p:cNvSpPr/>
           <p:nvPr/>
         </p:nvSpPr>
@@ -4444,14 +4486,14 @@
       </p:sp>
       <p:sp>
         <p:nvSpPr>
-          <p:cNvPr id="36" name="TextBox 35"/>
+          <p:cNvPr id="37" name="TextBox 36"/>
           <p:cNvSpPr txBox="1"/>
           <p:nvPr/>
         </p:nvSpPr>
         <p:spPr>
           <a:xfrm>
             <a:off x="32552640" y="13233400"/>
-            <a:ext cx="4879238" cy="365760"/>
+            <a:ext cx="4030675" cy="365760"/>
           </a:xfrm>
           <a:prstGeom prst="rect">
             <a:avLst/>
@@ -4486,14 +4528,14 @@
       </p:sp>
       <p:sp>
         <p:nvSpPr>
-          <p:cNvPr id="37" name="TextBox 36"/>
+          <p:cNvPr id="38" name="TextBox 37"/>
           <p:cNvSpPr txBox="1"/>
           <p:nvPr/>
         </p:nvSpPr>
         <p:spPr>
           <a:xfrm>
-            <a:off x="37431878" y="13233400"/>
-            <a:ext cx="2863900" cy="365760"/>
+            <a:off x="36583315" y="13233400"/>
+            <a:ext cx="2227478" cy="365760"/>
           </a:xfrm>
           <a:prstGeom prst="rect">
             <a:avLst/>
@@ -4528,14 +4570,14 @@
       </p:sp>
       <p:sp>
         <p:nvSpPr>
-          <p:cNvPr id="38" name="TextBox 37"/>
+          <p:cNvPr id="39" name="TextBox 38"/>
           <p:cNvSpPr txBox="1"/>
           <p:nvPr/>
         </p:nvSpPr>
         <p:spPr>
           <a:xfrm>
-            <a:off x="40295779" y="13233400"/>
-            <a:ext cx="2863900" cy="365760"/>
+            <a:off x="38810793" y="13233400"/>
+            <a:ext cx="2227478" cy="365760"/>
           </a:xfrm>
           <a:prstGeom prst="rect">
             <a:avLst/>
@@ -4570,14 +4612,56 @@
       </p:sp>
       <p:sp>
         <p:nvSpPr>
-          <p:cNvPr id="39" name="TextBox 38"/>
+          <p:cNvPr id="40" name="TextBox 39"/>
           <p:cNvSpPr txBox="1"/>
           <p:nvPr/>
         </p:nvSpPr>
         <p:spPr>
           <a:xfrm>
+            <a:off x="41038272" y="13233400"/>
+            <a:ext cx="2121408" cy="365760"/>
+          </a:xfrm>
+          <a:prstGeom prst="rect">
+            <a:avLst/>
+          </a:prstGeom>
+          <a:noFill/>
+        </p:spPr>
+        <p:txBody>
+          <a:bodyPr wrap="square" lIns="0" rIns="0" tIns="0" bIns="0">
+            <a:spAutoFit/>
+          </a:bodyPr>
+          <a:lstStyle/>
+          <a:p>
+            <a:pPr algn="r">
+              <a:lnSpc>
+                <a:spcPct val="100000"/>
+              </a:lnSpc>
+              <a:spcAft>
+                <a:spcPts val="0"/>
+              </a:spcAft>
+            </a:pPr>
+            <a:r>
+              <a:rPr sz="1700" b="0">
+                <a:solidFill>
+                  <a:srgbClr val="1E293B"/>
+                </a:solidFill>
+                <a:latin typeface="Arial"/>
+              </a:rPr>
+              <a:t>—</a:t>
+            </a:r>
+          </a:p>
+        </p:txBody>
+      </p:sp>
+      <p:sp>
+        <p:nvSpPr>
+          <p:cNvPr id="41" name="TextBox 40"/>
+          <p:cNvSpPr txBox="1"/>
+          <p:nvPr/>
+        </p:nvSpPr>
+        <p:spPr>
+          <a:xfrm>
             <a:off x="32552640" y="13635735"/>
-            <a:ext cx="4879238" cy="365760"/>
+            <a:ext cx="4030675" cy="365760"/>
           </a:xfrm>
           <a:prstGeom prst="rect">
             <a:avLst/>
@@ -4612,14 +4696,14 @@
       </p:sp>
       <p:sp>
         <p:nvSpPr>
-          <p:cNvPr id="40" name="TextBox 39"/>
+          <p:cNvPr id="42" name="TextBox 41"/>
           <p:cNvSpPr txBox="1"/>
           <p:nvPr/>
         </p:nvSpPr>
         <p:spPr>
           <a:xfrm>
-            <a:off x="37431878" y="13635735"/>
-            <a:ext cx="2863900" cy="365760"/>
+            <a:off x="36583315" y="13635735"/>
+            <a:ext cx="2227478" cy="365760"/>
           </a:xfrm>
           <a:prstGeom prst="rect">
             <a:avLst/>
@@ -4654,14 +4738,14 @@
       </p:sp>
       <p:sp>
         <p:nvSpPr>
-          <p:cNvPr id="41" name="TextBox 40"/>
+          <p:cNvPr id="43" name="TextBox 42"/>
           <p:cNvSpPr txBox="1"/>
           <p:nvPr/>
         </p:nvSpPr>
         <p:spPr>
           <a:xfrm>
-            <a:off x="40295779" y="13635735"/>
-            <a:ext cx="2863900" cy="365760"/>
+            <a:off x="38810793" y="13635735"/>
+            <a:ext cx="2227478" cy="365760"/>
           </a:xfrm>
           <a:prstGeom prst="rect">
             <a:avLst/>
@@ -4696,14 +4780,56 @@
       </p:sp>
       <p:sp>
         <p:nvSpPr>
-          <p:cNvPr id="42" name="TextBox 41"/>
+          <p:cNvPr id="44" name="TextBox 43"/>
           <p:cNvSpPr txBox="1"/>
           <p:nvPr/>
         </p:nvSpPr>
         <p:spPr>
           <a:xfrm>
+            <a:off x="41038272" y="13635735"/>
+            <a:ext cx="2121408" cy="365760"/>
+          </a:xfrm>
+          <a:prstGeom prst="rect">
+            <a:avLst/>
+          </a:prstGeom>
+          <a:noFill/>
+        </p:spPr>
+        <p:txBody>
+          <a:bodyPr wrap="square" lIns="0" rIns="0" tIns="0" bIns="0">
+            <a:spAutoFit/>
+          </a:bodyPr>
+          <a:lstStyle/>
+          <a:p>
+            <a:pPr algn="r">
+              <a:lnSpc>
+                <a:spcPct val="100000"/>
+              </a:lnSpc>
+              <a:spcAft>
+                <a:spcPts val="0"/>
+              </a:spcAft>
+            </a:pPr>
+            <a:r>
+              <a:rPr sz="1700" b="0">
+                <a:solidFill>
+                  <a:srgbClr val="1E293B"/>
+                </a:solidFill>
+                <a:latin typeface="Arial"/>
+              </a:rPr>
+              <a:t>116</a:t>
+            </a:r>
+          </a:p>
+        </p:txBody>
+      </p:sp>
+      <p:sp>
+        <p:nvSpPr>
+          <p:cNvPr id="45" name="TextBox 44"/>
+          <p:cNvSpPr txBox="1"/>
+          <p:nvPr/>
+        </p:nvSpPr>
+        <p:spPr>
+          <a:xfrm>
             <a:off x="32552640" y="14038071"/>
-            <a:ext cx="4879238" cy="365760"/>
+            <a:ext cx="4030675" cy="365760"/>
           </a:xfrm>
           <a:prstGeom prst="rect">
             <a:avLst/>
@@ -4738,14 +4864,14 @@
       </p:sp>
       <p:sp>
         <p:nvSpPr>
-          <p:cNvPr id="43" name="TextBox 42"/>
+          <p:cNvPr id="46" name="TextBox 45"/>
           <p:cNvSpPr txBox="1"/>
           <p:nvPr/>
         </p:nvSpPr>
         <p:spPr>
           <a:xfrm>
-            <a:off x="37431878" y="14038071"/>
-            <a:ext cx="2863900" cy="365760"/>
+            <a:off x="36583315" y="14038071"/>
+            <a:ext cx="2227478" cy="365760"/>
           </a:xfrm>
           <a:prstGeom prst="rect">
             <a:avLst/>
@@ -4780,14 +4906,14 @@
       </p:sp>
       <p:sp>
         <p:nvSpPr>
-          <p:cNvPr id="44" name="TextBox 43"/>
+          <p:cNvPr id="47" name="TextBox 46"/>
           <p:cNvSpPr txBox="1"/>
           <p:nvPr/>
         </p:nvSpPr>
         <p:spPr>
           <a:xfrm>
-            <a:off x="40295779" y="14038071"/>
-            <a:ext cx="2863900" cy="365760"/>
+            <a:off x="38810793" y="14038071"/>
+            <a:ext cx="2227478" cy="365760"/>
           </a:xfrm>
           <a:prstGeom prst="rect">
             <a:avLst/>
@@ -4822,14 +4948,56 @@
       </p:sp>
       <p:sp>
         <p:nvSpPr>
-          <p:cNvPr id="45" name="TextBox 44"/>
+          <p:cNvPr id="48" name="TextBox 47"/>
           <p:cNvSpPr txBox="1"/>
           <p:nvPr/>
         </p:nvSpPr>
         <p:spPr>
           <a:xfrm>
+            <a:off x="41038272" y="14038071"/>
+            <a:ext cx="2121408" cy="365760"/>
+          </a:xfrm>
+          <a:prstGeom prst="rect">
+            <a:avLst/>
+          </a:prstGeom>
+          <a:noFill/>
+        </p:spPr>
+        <p:txBody>
+          <a:bodyPr wrap="square" lIns="0" rIns="0" tIns="0" bIns="0">
+            <a:spAutoFit/>
+          </a:bodyPr>
+          <a:lstStyle/>
+          <a:p>
+            <a:pPr algn="r">
+              <a:lnSpc>
+                <a:spcPct val="100000"/>
+              </a:lnSpc>
+              <a:spcAft>
+                <a:spcPts val="0"/>
+              </a:spcAft>
+            </a:pPr>
+            <a:r>
+              <a:rPr sz="1700" b="0">
+                <a:solidFill>
+                  <a:srgbClr val="1E293B"/>
+                </a:solidFill>
+                <a:latin typeface="Arial"/>
+              </a:rPr>
+              <a:t>113</a:t>
+            </a:r>
+          </a:p>
+        </p:txBody>
+      </p:sp>
+      <p:sp>
+        <p:nvSpPr>
+          <p:cNvPr id="49" name="TextBox 48"/>
+          <p:cNvSpPr txBox="1"/>
+          <p:nvPr/>
+        </p:nvSpPr>
+        <p:spPr>
+          <a:xfrm>
             <a:off x="32552640" y="14440407"/>
-            <a:ext cx="4879238" cy="365760"/>
+            <a:ext cx="4030675" cy="365760"/>
           </a:xfrm>
           <a:prstGeom prst="rect">
             <a:avLst/>
@@ -4864,14 +5032,14 @@
       </p:sp>
       <p:sp>
         <p:nvSpPr>
-          <p:cNvPr id="46" name="TextBox 45"/>
+          <p:cNvPr id="50" name="TextBox 49"/>
           <p:cNvSpPr txBox="1"/>
           <p:nvPr/>
         </p:nvSpPr>
         <p:spPr>
           <a:xfrm>
-            <a:off x="37431878" y="14440407"/>
-            <a:ext cx="2863900" cy="365760"/>
+            <a:off x="36583315" y="14440407"/>
+            <a:ext cx="2227478" cy="365760"/>
           </a:xfrm>
           <a:prstGeom prst="rect">
             <a:avLst/>
@@ -4906,14 +5074,14 @@
       </p:sp>
       <p:sp>
         <p:nvSpPr>
-          <p:cNvPr id="47" name="TextBox 46"/>
+          <p:cNvPr id="51" name="TextBox 50"/>
           <p:cNvSpPr txBox="1"/>
           <p:nvPr/>
         </p:nvSpPr>
         <p:spPr>
           <a:xfrm>
-            <a:off x="40295779" y="14440407"/>
-            <a:ext cx="2863900" cy="365760"/>
+            <a:off x="38810793" y="14440407"/>
+            <a:ext cx="2227478" cy="365760"/>
           </a:xfrm>
           <a:prstGeom prst="rect">
             <a:avLst/>
@@ -4948,14 +5116,56 @@
       </p:sp>
       <p:sp>
         <p:nvSpPr>
-          <p:cNvPr id="48" name="TextBox 47"/>
+          <p:cNvPr id="52" name="TextBox 51"/>
           <p:cNvSpPr txBox="1"/>
           <p:nvPr/>
         </p:nvSpPr>
         <p:spPr>
           <a:xfrm>
+            <a:off x="41038272" y="14440407"/>
+            <a:ext cx="2121408" cy="365760"/>
+          </a:xfrm>
+          <a:prstGeom prst="rect">
+            <a:avLst/>
+          </a:prstGeom>
+          <a:noFill/>
+        </p:spPr>
+        <p:txBody>
+          <a:bodyPr wrap="square" lIns="0" rIns="0" tIns="0" bIns="0">
+            <a:spAutoFit/>
+          </a:bodyPr>
+          <a:lstStyle/>
+          <a:p>
+            <a:pPr algn="r">
+              <a:lnSpc>
+                <a:spcPct val="100000"/>
+              </a:lnSpc>
+              <a:spcAft>
+                <a:spcPts val="0"/>
+              </a:spcAft>
+            </a:pPr>
+            <a:r>
+              <a:rPr sz="1700" b="0">
+                <a:solidFill>
+                  <a:srgbClr val="1E293B"/>
+                </a:solidFill>
+                <a:latin typeface="Arial"/>
+              </a:rPr>
+              <a:t>114</a:t>
+            </a:r>
+          </a:p>
+        </p:txBody>
+      </p:sp>
+      <p:sp>
+        <p:nvSpPr>
+          <p:cNvPr id="53" name="TextBox 52"/>
+          <p:cNvSpPr txBox="1"/>
+          <p:nvPr/>
+        </p:nvSpPr>
+        <p:spPr>
+          <a:xfrm>
             <a:off x="32552640" y="14842743"/>
-            <a:ext cx="4879238" cy="365760"/>
+            <a:ext cx="4030675" cy="365760"/>
           </a:xfrm>
           <a:prstGeom prst="rect">
             <a:avLst/>
@@ -4977,9 +5187,9 @@
               </a:spcAft>
             </a:pPr>
             <a:r>
-              <a:rPr sz="1700" b="1">
-                <a:solidFill>
-                  <a:srgbClr val="1C6FB5"/>
+              <a:rPr sz="1700" b="0">
+                <a:solidFill>
+                  <a:srgbClr val="1E293B"/>
                 </a:solidFill>
                 <a:latin typeface="Arial"/>
               </a:rPr>
@@ -4990,14 +5200,14 @@
       </p:sp>
       <p:sp>
         <p:nvSpPr>
-          <p:cNvPr id="49" name="TextBox 48"/>
+          <p:cNvPr id="54" name="TextBox 53"/>
           <p:cNvSpPr txBox="1"/>
           <p:nvPr/>
         </p:nvSpPr>
         <p:spPr>
           <a:xfrm>
-            <a:off x="37431878" y="14842743"/>
-            <a:ext cx="2863900" cy="365760"/>
+            <a:off x="36583315" y="14842743"/>
+            <a:ext cx="2227478" cy="365760"/>
           </a:xfrm>
           <a:prstGeom prst="rect">
             <a:avLst/>
@@ -5019,9 +5229,9 @@
               </a:spcAft>
             </a:pPr>
             <a:r>
-              <a:rPr sz="1700" b="1">
-                <a:solidFill>
-                  <a:srgbClr val="1C6FB5"/>
+              <a:rPr sz="1700" b="0">
+                <a:solidFill>
+                  <a:srgbClr val="1E293B"/>
                 </a:solidFill>
                 <a:latin typeface="Arial"/>
               </a:rPr>
@@ -5032,14 +5242,14 @@
       </p:sp>
       <p:sp>
         <p:nvSpPr>
-          <p:cNvPr id="50" name="TextBox 49"/>
+          <p:cNvPr id="55" name="TextBox 54"/>
           <p:cNvSpPr txBox="1"/>
           <p:nvPr/>
         </p:nvSpPr>
         <p:spPr>
           <a:xfrm>
-            <a:off x="40295779" y="14842743"/>
-            <a:ext cx="2863900" cy="365760"/>
+            <a:off x="38810793" y="14842743"/>
+            <a:ext cx="2227478" cy="365760"/>
           </a:xfrm>
           <a:prstGeom prst="rect">
             <a:avLst/>
@@ -5061,9 +5271,9 @@
               </a:spcAft>
             </a:pPr>
             <a:r>
-              <a:rPr sz="1700" b="1">
-                <a:solidFill>
-                  <a:srgbClr val="1C6FB5"/>
+              <a:rPr sz="1700" b="0">
+                <a:solidFill>
+                  <a:srgbClr val="1E293B"/>
                 </a:solidFill>
                 <a:latin typeface="Arial"/>
               </a:rPr>
@@ -5074,7 +5284,49 @@
       </p:sp>
       <p:sp>
         <p:nvSpPr>
-          <p:cNvPr id="51" name="Rectangle 50"/>
+          <p:cNvPr id="56" name="TextBox 55"/>
+          <p:cNvSpPr txBox="1"/>
+          <p:nvPr/>
+        </p:nvSpPr>
+        <p:spPr>
+          <a:xfrm>
+            <a:off x="41038272" y="14842743"/>
+            <a:ext cx="2121408" cy="365760"/>
+          </a:xfrm>
+          <a:prstGeom prst="rect">
+            <a:avLst/>
+          </a:prstGeom>
+          <a:noFill/>
+        </p:spPr>
+        <p:txBody>
+          <a:bodyPr wrap="square" lIns="0" rIns="0" tIns="0" bIns="0">
+            <a:spAutoFit/>
+          </a:bodyPr>
+          <a:lstStyle/>
+          <a:p>
+            <a:pPr algn="r">
+              <a:lnSpc>
+                <a:spcPct val="100000"/>
+              </a:lnSpc>
+              <a:spcAft>
+                <a:spcPts val="0"/>
+              </a:spcAft>
+            </a:pPr>
+            <a:r>
+              <a:rPr sz="1700" b="0">
+                <a:solidFill>
+                  <a:srgbClr val="1E293B"/>
+                </a:solidFill>
+                <a:latin typeface="Arial"/>
+              </a:rPr>
+              <a:t>57</a:t>
+            </a:r>
+          </a:p>
+        </p:txBody>
+      </p:sp>
+      <p:sp>
+        <p:nvSpPr>
+          <p:cNvPr id="57" name="Rectangle 56"/>
           <p:cNvSpPr/>
           <p:nvPr/>
         </p:nvSpPr>
@@ -5118,7 +5370,7 @@
       </p:sp>
       <p:sp>
         <p:nvSpPr>
-          <p:cNvPr id="52" name="TextBox 51"/>
+          <p:cNvPr id="58" name="TextBox 57"/>
           <p:cNvSpPr txBox="1"/>
           <p:nvPr/>
         </p:nvSpPr>
@@ -5160,7 +5412,7 @@
       </p:sp>
       <p:sp>
         <p:nvSpPr>
-          <p:cNvPr id="53" name="TextBox 52"/>
+          <p:cNvPr id="59" name="TextBox 58"/>
           <p:cNvSpPr txBox="1"/>
           <p:nvPr/>
         </p:nvSpPr>
@@ -5202,7 +5454,7 @@
       </p:sp>
       <p:sp>
         <p:nvSpPr>
-          <p:cNvPr id="54" name="Rectangle 53"/>
+          <p:cNvPr id="60" name="Rectangle 59"/>
           <p:cNvSpPr/>
           <p:nvPr/>
         </p:nvSpPr>
@@ -5246,7 +5498,7 @@
       </p:sp>
       <p:sp>
         <p:nvSpPr>
-          <p:cNvPr id="55" name="TextBox 54"/>
+          <p:cNvPr id="61" name="TextBox 60"/>
           <p:cNvSpPr txBox="1"/>
           <p:nvPr/>
         </p:nvSpPr>
@@ -5288,7 +5540,7 @@
       </p:sp>
       <p:sp>
         <p:nvSpPr>
-          <p:cNvPr id="56" name="TextBox 55"/>
+          <p:cNvPr id="62" name="TextBox 61"/>
           <p:cNvSpPr txBox="1"/>
           <p:nvPr/>
         </p:nvSpPr>
@@ -5330,7 +5582,7 @@
       </p:sp>
       <p:sp>
         <p:nvSpPr>
-          <p:cNvPr id="57" name="TextBox 56"/>
+          <p:cNvPr id="63" name="TextBox 62"/>
           <p:cNvSpPr txBox="1"/>
           <p:nvPr/>
         </p:nvSpPr>
@@ -5372,7 +5624,7 @@
       </p:sp>
       <p:sp>
         <p:nvSpPr>
-          <p:cNvPr id="58" name="Rectangle 57"/>
+          <p:cNvPr id="64" name="Rectangle 63"/>
           <p:cNvSpPr/>
           <p:nvPr/>
         </p:nvSpPr>
@@ -5416,7 +5668,7 @@
       </p:sp>
       <p:sp>
         <p:nvSpPr>
-          <p:cNvPr id="59" name="TextBox 58"/>
+          <p:cNvPr id="65" name="TextBox 64"/>
           <p:cNvSpPr txBox="1"/>
           <p:nvPr/>
         </p:nvSpPr>
@@ -5458,7 +5710,7 @@
       </p:sp>
       <p:sp>
         <p:nvSpPr>
-          <p:cNvPr id="60" name="TextBox 59"/>
+          <p:cNvPr id="66" name="TextBox 65"/>
           <p:cNvSpPr txBox="1"/>
           <p:nvPr/>
         </p:nvSpPr>
@@ -5500,7 +5752,7 @@
       </p:sp>
       <p:sp>
         <p:nvSpPr>
-          <p:cNvPr id="61" name="TextBox 60"/>
+          <p:cNvPr id="67" name="TextBox 66"/>
           <p:cNvSpPr txBox="1"/>
           <p:nvPr/>
         </p:nvSpPr>
@@ -5542,7 +5794,7 @@
       </p:sp>
       <p:sp>
         <p:nvSpPr>
-          <p:cNvPr id="62" name="TextBox 61"/>
+          <p:cNvPr id="68" name="TextBox 67"/>
           <p:cNvSpPr txBox="1"/>
           <p:nvPr/>
         </p:nvSpPr>
@@ -5584,7 +5836,7 @@
       </p:sp>
       <p:sp>
         <p:nvSpPr>
-          <p:cNvPr id="63" name="TextBox 62"/>
+          <p:cNvPr id="69" name="TextBox 68"/>
           <p:cNvSpPr txBox="1"/>
           <p:nvPr/>
         </p:nvSpPr>
@@ -5626,7 +5878,7 @@
       </p:sp>
       <p:sp>
         <p:nvSpPr>
-          <p:cNvPr id="64" name="TextBox 63"/>
+          <p:cNvPr id="70" name="TextBox 69"/>
           <p:cNvSpPr txBox="1"/>
           <p:nvPr/>
         </p:nvSpPr>
@@ -5668,7 +5920,7 @@
       </p:sp>
       <p:sp>
         <p:nvSpPr>
-          <p:cNvPr id="65" name="TextBox 64"/>
+          <p:cNvPr id="71" name="TextBox 70"/>
           <p:cNvSpPr txBox="1"/>
           <p:nvPr/>
         </p:nvSpPr>
@@ -5710,7 +5962,7 @@
       </p:sp>
       <p:sp>
         <p:nvSpPr>
-          <p:cNvPr id="66" name="TextBox 65"/>
+          <p:cNvPr id="72" name="TextBox 71"/>
           <p:cNvSpPr txBox="1"/>
           <p:nvPr/>
         </p:nvSpPr>
@@ -5752,7 +6004,7 @@
       </p:sp>
       <p:sp>
         <p:nvSpPr>
-          <p:cNvPr id="67" name="TextBox 66"/>
+          <p:cNvPr id="73" name="TextBox 72"/>
           <p:cNvSpPr txBox="1"/>
           <p:nvPr/>
         </p:nvSpPr>
@@ -5794,7 +6046,7 @@
       </p:sp>
       <p:sp>
         <p:nvSpPr>
-          <p:cNvPr id="68" name="TextBox 67"/>
+          <p:cNvPr id="74" name="TextBox 73"/>
           <p:cNvSpPr txBox="1"/>
           <p:nvPr/>
         </p:nvSpPr>
@@ -5836,7 +6088,7 @@
       </p:sp>
       <p:sp>
         <p:nvSpPr>
-          <p:cNvPr id="69" name="TextBox 68"/>
+          <p:cNvPr id="75" name="TextBox 74"/>
           <p:cNvSpPr txBox="1"/>
           <p:nvPr/>
         </p:nvSpPr>
@@ -5878,7 +6130,7 @@
       </p:sp>
       <p:sp>
         <p:nvSpPr>
-          <p:cNvPr id="70" name="TextBox 69"/>
+          <p:cNvPr id="76" name="TextBox 75"/>
           <p:cNvSpPr txBox="1"/>
           <p:nvPr/>
         </p:nvSpPr>
@@ -5920,7 +6172,7 @@
       </p:sp>
       <p:sp>
         <p:nvSpPr>
-          <p:cNvPr id="71" name="Rectangle 70"/>
+          <p:cNvPr id="77" name="Rectangle 76"/>
           <p:cNvSpPr/>
           <p:nvPr/>
         </p:nvSpPr>
@@ -5964,7 +6216,7 @@
       </p:sp>
       <p:sp>
         <p:nvSpPr>
-          <p:cNvPr id="72" name="TextBox 71"/>
+          <p:cNvPr id="78" name="TextBox 77"/>
           <p:cNvSpPr txBox="1"/>
           <p:nvPr/>
         </p:nvSpPr>
@@ -6006,7 +6258,7 @@
       </p:sp>
       <p:sp>
         <p:nvSpPr>
-          <p:cNvPr id="73" name="TextBox 72"/>
+          <p:cNvPr id="79" name="TextBox 78"/>
           <p:cNvSpPr txBox="1"/>
           <p:nvPr/>
         </p:nvSpPr>
@@ -6048,7 +6300,7 @@
       </p:sp>
       <p:sp>
         <p:nvSpPr>
-          <p:cNvPr id="74" name="Rectangle 73"/>
+          <p:cNvPr id="80" name="Rectangle 79"/>
           <p:cNvSpPr/>
           <p:nvPr/>
         </p:nvSpPr>
@@ -6092,7 +6344,7 @@
       </p:sp>
       <p:pic>
         <p:nvPicPr>
-          <p:cNvPr id="75" name="Picture 74" descr="m_ledger.png"/>
+          <p:cNvPr id="81" name="Picture 80" descr="m_ledger.png"/>
           <p:cNvPicPr>
             <a:picLocks noChangeAspect="1"/>
           </p:cNvPicPr>
@@ -6116,7 +6368,7 @@
       </p:pic>
       <p:sp>
         <p:nvSpPr>
-          <p:cNvPr id="76" name="TextBox 75"/>
+          <p:cNvPr id="82" name="TextBox 81"/>
           <p:cNvSpPr txBox="1"/>
           <p:nvPr/>
         </p:nvSpPr>
@@ -6151,14 +6403,14 @@
                 </a:solidFill>
                 <a:latin typeface="Arial"/>
               </a:rPr>
-              <a:t>Figure 6.  27 distinct models, in four families, on one holdout or one incident corpus. One of them is deployed. The zero-shot column is a single deterministic pass per model with no repeats; the reviewer column is the 149-case dev split, and two of its arms are still running.</a:t>
-            </a:r>
-          </a:p>
-        </p:txBody>
-      </p:sp>
-      <p:sp>
-        <p:nvSpPr>
-          <p:cNvPr id="77" name="TextBox 76"/>
+              <a:t>Figure 6.  30 rows in four families, which is 27 distinct models: OWLv2-large and Qwen2.5-7B each appear twice because each does two jobs here. One model is deployed. The zero-shot column is a single deterministic pass per model with no repeats, scored as mAP50 on the 848-image split; the reviewer column is the 149-case dev split, and two of its arms are still running. RF-DETR's score is on a third scale and is never differenced against the rows above it: the one measured offset between two of our evaluators, 0.0239, is larger than the gap on display.</a:t>
+            </a:r>
+          </a:p>
+        </p:txBody>
+      </p:sp>
+      <p:sp>
+        <p:nvSpPr>
+          <p:cNvPr id="83" name="TextBox 82"/>
           <p:cNvSpPr txBox="1"/>
           <p:nvPr/>
         </p:nvSpPr>
@@ -6200,7 +6452,7 @@
       </p:sp>
       <p:sp>
         <p:nvSpPr>
-          <p:cNvPr id="78" name="Rectangle 77"/>
+          <p:cNvPr id="84" name="Rectangle 83"/>
           <p:cNvSpPr/>
           <p:nvPr/>
         </p:nvSpPr>
@@ -6244,7 +6496,7 @@
       </p:sp>
       <p:pic>
         <p:nvPicPr>
-          <p:cNvPr id="79" name="Picture 78" descr="s_sources.png"/>
+          <p:cNvPr id="85" name="Picture 84" descr="s_sources.png"/>
           <p:cNvPicPr>
             <a:picLocks noChangeAspect="1"/>
           </p:cNvPicPr>
@@ -6268,7 +6520,7 @@
       </p:pic>
       <p:sp>
         <p:nvSpPr>
-          <p:cNvPr id="80" name="TextBox 79"/>
+          <p:cNvPr id="86" name="TextBox 85"/>
           <p:cNvSpPr txBox="1"/>
           <p:nvPr/>
         </p:nvSpPr>
@@ -6310,7 +6562,7 @@
       </p:sp>
       <p:sp>
         <p:nvSpPr>
-          <p:cNvPr id="81" name="TextBox 80"/>
+          <p:cNvPr id="87" name="TextBox 86"/>
           <p:cNvSpPr txBox="1"/>
           <p:nvPr/>
         </p:nvSpPr>
@@ -6352,7 +6604,7 @@
       </p:sp>
       <p:sp>
         <p:nvSpPr>
-          <p:cNvPr id="82" name="Rectangle 81"/>
+          <p:cNvPr id="88" name="Rectangle 87"/>
           <p:cNvSpPr/>
           <p:nvPr/>
         </p:nvSpPr>
@@ -6396,7 +6648,7 @@
       </p:sp>
       <p:pic>
         <p:nvPicPr>
-          <p:cNvPr id="83" name="Picture 82" descr="p_field.png"/>
+          <p:cNvPr id="89" name="Picture 88" descr="p_field.png"/>
           <p:cNvPicPr>
             <a:picLocks noChangeAspect="1"/>
           </p:cNvPicPr>
@@ -6420,7 +6672,7 @@
       </p:pic>
       <p:sp>
         <p:nvSpPr>
-          <p:cNvPr id="84" name="TextBox 83"/>
+          <p:cNvPr id="90" name="TextBox 89"/>
           <p:cNvSpPr txBox="1"/>
           <p:nvPr/>
         </p:nvSpPr>
@@ -6462,7 +6714,7 @@
       </p:sp>
       <p:sp>
         <p:nvSpPr>
-          <p:cNvPr id="85" name="Rectangle 84"/>
+          <p:cNvPr id="91" name="Rectangle 90"/>
           <p:cNvSpPr/>
           <p:nvPr/>
         </p:nvSpPr>
@@ -6506,7 +6758,7 @@
       </p:sp>
       <p:sp>
         <p:nvSpPr>
-          <p:cNvPr id="86" name="TextBox 85"/>
+          <p:cNvPr id="92" name="TextBox 91"/>
           <p:cNvSpPr txBox="1"/>
           <p:nvPr/>
         </p:nvSpPr>
@@ -6548,7 +6800,7 @@
       </p:sp>
       <p:sp>
         <p:nvSpPr>
-          <p:cNvPr id="87" name="TextBox 86"/>
+          <p:cNvPr id="93" name="TextBox 92"/>
           <p:cNvSpPr txBox="1"/>
           <p:nvPr/>
         </p:nvSpPr>
@@ -6583,14 +6835,14 @@
                 </a:solidFill>
                 <a:latin typeface="Arial"/>
               </a:rPr>
-              <a:t>What we ran. 27 distinct models in four families: five detectors trained on our own holdout, two vision models inside the loop, fourteen vision-language models zero-shot, and nine language models as reviewers. One is deployed.</a:t>
-            </a:r>
-          </a:p>
-        </p:txBody>
-      </p:sp>
-      <p:sp>
-        <p:nvSpPr>
-          <p:cNvPr id="88" name="TextBox 87"/>
+              <a:t>What we ran. Thirty model runs in four families: five detectors trained on our own holdout, two vision models inside the loop, fourteen vision-language models zero-shot, and nine language models as reviewers. That is 27 distinct models, because OWLv2-large and Qwen2.5-7B each do two of those jobs. One is deployed.</a:t>
+            </a:r>
+          </a:p>
+        </p:txBody>
+      </p:sp>
+      <p:sp>
+        <p:nvSpPr>
+          <p:cNvPr id="94" name="TextBox 93"/>
           <p:cNvSpPr txBox="1"/>
           <p:nvPr/>
         </p:nvSpPr>
@@ -6625,7 +6877,7 @@
                 </a:solidFill>
                 <a:latin typeface="Arial"/>
               </a:rPr>
-              <a:t>Numbers we withdrew. 0.910 was a data leak, found by a check we built after publishing it. 0.9033 is the best of four unseeded runs. An earlier reading of the ladder as a flat curve is retracted.</a:t>
+              <a:t>How the numbers were made. The 1,977-image holdout was also the validation set during training, so every mAP here is a run's best epoch, a maximum over 21 to 100 evaluations on the set it is reported on. Numbers we withdrew: 0.910 was a data leak found by a check we built after publishing it, 0.9033 is the best of four unseeded runs, and an earlier reading of the ladder as a flat curve is retracted.</a:t>
             </a:r>
           </a:p>
         </p:txBody>

--- a/docs/poster/draft_B_journey.pptx
+++ b/docs/poster/draft_B_journey.pptx
@@ -3097,13 +3097,13 @@
         <p:spPr>
           <a:xfrm>
             <a:off x="0" y="0"/>
-            <a:ext cx="43891200" cy="3931920"/>
+            <a:ext cx="43891200" cy="32918400"/>
           </a:xfrm>
           <a:prstGeom prst="rect">
             <a:avLst/>
           </a:prstGeom>
           <a:solidFill>
-            <a:srgbClr val="14314E"/>
+            <a:srgbClr val="FFFFFF"/>
           </a:solidFill>
           <a:ln>
             <a:noFill/>
@@ -3140,14 +3140,14 @@
         </p:nvSpPr>
         <p:spPr>
           <a:xfrm>
-            <a:off x="0" y="3931920"/>
-            <a:ext cx="43891200" cy="45720"/>
+            <a:off x="0" y="0"/>
+            <a:ext cx="43891200" cy="3931920"/>
           </a:xfrm>
           <a:prstGeom prst="rect">
             <a:avLst/>
           </a:prstGeom>
           <a:solidFill>
-            <a:srgbClr val="1C6FB5"/>
+            <a:srgbClr val="14314E"/>
           </a:solidFill>
           <a:ln>
             <a:noFill/>
@@ -3178,224 +3178,14 @@
       </p:sp>
       <p:sp>
         <p:nvSpPr>
-          <p:cNvPr id="4" name="TextBox 3"/>
-          <p:cNvSpPr txBox="1"/>
-          <p:nvPr/>
-        </p:nvSpPr>
-        <p:spPr>
-          <a:xfrm>
-            <a:off x="731520" y="384048"/>
-            <a:ext cx="42428160" cy="365760"/>
-          </a:xfrm>
-          <a:prstGeom prst="rect">
-            <a:avLst/>
-          </a:prstGeom>
-          <a:noFill/>
-        </p:spPr>
-        <p:txBody>
-          <a:bodyPr wrap="square" lIns="0" rIns="0" tIns="0" bIns="0">
-            <a:spAutoFit/>
-          </a:bodyPr>
-          <a:lstStyle/>
-          <a:p>
-            <a:pPr algn="l">
-              <a:lnSpc>
-                <a:spcPct val="95000"/>
-              </a:lnSpc>
-              <a:spcAft>
-                <a:spcPts val="0"/>
-              </a:spcAft>
-            </a:pPr>
-            <a:r>
-              <a:rPr sz="10200" b="1">
-                <a:solidFill>
-                  <a:srgbClr val="FFFFFF"/>
-                </a:solidFill>
-                <a:latin typeface="Arial"/>
-              </a:rPr>
-              <a:t>How Much of This Pipeline Can the Agents Run by Themselves?</a:t>
-            </a:r>
-          </a:p>
-        </p:txBody>
-      </p:sp>
-      <p:sp>
-        <p:nvSpPr>
-          <p:cNvPr id="5" name="TextBox 4"/>
-          <p:cNvSpPr txBox="1"/>
-          <p:nvPr/>
-        </p:nvSpPr>
-        <p:spPr>
-          <a:xfrm>
-            <a:off x="731520" y="2121408"/>
-            <a:ext cx="42428160" cy="365760"/>
-          </a:xfrm>
-          <a:prstGeom prst="rect">
-            <a:avLst/>
-          </a:prstGeom>
-          <a:noFill/>
-        </p:spPr>
-        <p:txBody>
-          <a:bodyPr wrap="square" lIns="0" rIns="0" tIns="0" bIns="0">
-            <a:spAutoFit/>
-          </a:bodyPr>
-          <a:lstStyle/>
-          <a:p>
-            <a:pPr algn="l">
-              <a:lnSpc>
-                <a:spcPct val="100000"/>
-              </a:lnSpc>
-              <a:spcAft>
-                <a:spcPts val="0"/>
-              </a:spcAft>
-            </a:pPr>
-            <a:r>
-              <a:rPr sz="4000" b="1">
-                <a:solidFill>
-                  <a:srgbClr val="FFFFFF"/>
-                </a:solidFill>
-                <a:latin typeface="Arial"/>
-              </a:rPr>
-              <a:t>Harry He   ·   Hongbo Zhang</a:t>
-            </a:r>
-          </a:p>
-        </p:txBody>
-      </p:sp>
-      <p:sp>
-        <p:nvSpPr>
-          <p:cNvPr id="6" name="TextBox 5"/>
-          <p:cNvSpPr txBox="1"/>
-          <p:nvPr/>
-        </p:nvSpPr>
-        <p:spPr>
-          <a:xfrm>
-            <a:off x="731520" y="2761488"/>
-            <a:ext cx="42428160" cy="365760"/>
-          </a:xfrm>
-          <a:prstGeom prst="rect">
-            <a:avLst/>
-          </a:prstGeom>
-          <a:noFill/>
-        </p:spPr>
-        <p:txBody>
-          <a:bodyPr wrap="square" lIns="0" rIns="0" tIns="0" bIns="0">
-            <a:spAutoFit/>
-          </a:bodyPr>
-          <a:lstStyle/>
-          <a:p>
-            <a:pPr algn="l">
-              <a:lnSpc>
-                <a:spcPct val="100000"/>
-              </a:lnSpc>
-              <a:spcAft>
-                <a:spcPts val="0"/>
-              </a:spcAft>
-            </a:pPr>
-            <a:r>
-              <a:rPr sz="2400" b="0">
-                <a:solidFill>
-                  <a:srgbClr val="C2CEDA"/>
-                </a:solidFill>
-                <a:latin typeface="Arial"/>
-              </a:rPr>
-              <a:t>Department of Engineering Technology   ·   Middle Tennessee State University, Murfreesboro, TN, USA</a:t>
-            </a:r>
-          </a:p>
-        </p:txBody>
-      </p:sp>
-      <p:sp>
-        <p:nvSpPr>
-          <p:cNvPr id="7" name="TextBox 6"/>
-          <p:cNvSpPr txBox="1"/>
-          <p:nvPr/>
-        </p:nvSpPr>
-        <p:spPr>
-          <a:xfrm>
-            <a:off x="731520" y="4315968"/>
-            <a:ext cx="42428160" cy="365760"/>
-          </a:xfrm>
-          <a:prstGeom prst="rect">
-            <a:avLst/>
-          </a:prstGeom>
-          <a:noFill/>
-        </p:spPr>
-        <p:txBody>
-          <a:bodyPr wrap="square" lIns="0" rIns="0" tIns="0" bIns="0">
-            <a:spAutoFit/>
-          </a:bodyPr>
-          <a:lstStyle/>
-          <a:p>
-            <a:pPr algn="l">
-              <a:lnSpc>
-                <a:spcPct val="116000"/>
-              </a:lnSpc>
-              <a:spcAft>
-                <a:spcPts val="0"/>
-              </a:spcAft>
-            </a:pPr>
-            <a:r>
-              <a:rPr sz="3400" b="0">
-                <a:solidFill>
-                  <a:srgbClr val="1E293B"/>
-                </a:solidFill>
-                <a:latin typeface="Arial"/>
-              </a:rPr>
-              <a:t>We spent six months finding out, on our own robots and on PSC Bridges-2. The answer is that collection and training run alone, and judging does not.</a:t>
-            </a:r>
-          </a:p>
-        </p:txBody>
-      </p:sp>
-      <p:sp>
-        <p:nvSpPr>
-          <p:cNvPr id="8" name="TextBox 7"/>
-          <p:cNvSpPr txBox="1"/>
-          <p:nvPr/>
-        </p:nvSpPr>
-        <p:spPr>
-          <a:xfrm>
-            <a:off x="731520" y="5623560"/>
-            <a:ext cx="42428160" cy="365760"/>
-          </a:xfrm>
-          <a:prstGeom prst="rect">
-            <a:avLst/>
-          </a:prstGeom>
-          <a:noFill/>
-        </p:spPr>
-        <p:txBody>
-          <a:bodyPr wrap="square" lIns="0" rIns="0" tIns="0" bIns="0">
-            <a:spAutoFit/>
-          </a:bodyPr>
-          <a:lstStyle/>
-          <a:p>
-            <a:pPr algn="l">
-              <a:lnSpc>
-                <a:spcPct val="95000"/>
-              </a:lnSpc>
-              <a:spcAft>
-                <a:spcPts val="0"/>
-              </a:spcAft>
-            </a:pPr>
-            <a:r>
-              <a:rPr sz="3400" b="1">
-                <a:solidFill>
-                  <a:srgbClr val="14314E"/>
-                </a:solidFill>
-                <a:latin typeface="Arial"/>
-              </a:rPr>
-              <a:t>The route we actually took</a:t>
-            </a:r>
-          </a:p>
-        </p:txBody>
-      </p:sp>
-      <p:sp>
-        <p:nvSpPr>
-          <p:cNvPr id="9" name="Rectangle 8"/>
+          <p:cNvPr id="4" name="Rectangle 3"/>
           <p:cNvSpPr/>
           <p:nvPr/>
         </p:nvSpPr>
         <p:spPr>
           <a:xfrm>
-            <a:off x="731520" y="6190488"/>
-            <a:ext cx="42428160" cy="27432"/>
+            <a:off x="0" y="3931920"/>
+            <a:ext cx="43891200" cy="45720"/>
           </a:xfrm>
           <a:prstGeom prst="rect">
             <a:avLst/>
@@ -3430,82 +3220,16 @@
           </a:p>
         </p:txBody>
       </p:sp>
-      <p:pic>
-        <p:nvPicPr>
-          <p:cNvPr id="10" name="Picture 9" descr="t_journey.png"/>
-          <p:cNvPicPr>
-            <a:picLocks noChangeAspect="1"/>
-          </p:cNvPicPr>
-          <p:nvPr/>
-        </p:nvPicPr>
-        <p:blipFill>
-          <a:blip r:embed="rId2"/>
-          <a:stretch>
-            <a:fillRect/>
-          </a:stretch>
-        </p:blipFill>
-        <p:spPr>
-          <a:xfrm>
-            <a:off x="731520" y="6519672"/>
-            <a:ext cx="42428160" cy="3017520"/>
-          </a:xfrm>
-          <a:prstGeom prst="rect">
-            <a:avLst/>
-          </a:prstGeom>
-        </p:spPr>
-      </p:pic>
-      <p:sp>
-        <p:nvSpPr>
-          <p:cNvPr id="11" name="TextBox 10"/>
+      <p:sp>
+        <p:nvSpPr>
+          <p:cNvPr id="5" name="TextBox 4"/>
           <p:cNvSpPr txBox="1"/>
           <p:nvPr/>
         </p:nvSpPr>
         <p:spPr>
           <a:xfrm>
-            <a:off x="731520" y="9646919"/>
+            <a:off x="731520" y="384048"/>
             <a:ext cx="42428160" cy="365760"/>
-          </a:xfrm>
-          <a:prstGeom prst="rect">
-            <a:avLst/>
-          </a:prstGeom>
-          <a:noFill/>
-        </p:spPr>
-        <p:txBody>
-          <a:bodyPr wrap="square" lIns="0" rIns="0" tIns="0" bIns="0">
-            <a:spAutoFit/>
-          </a:bodyPr>
-          <a:lstStyle/>
-          <a:p>
-            <a:pPr algn="l">
-              <a:lnSpc>
-                <a:spcPct val="118000"/>
-              </a:lnSpc>
-              <a:spcAft>
-                <a:spcPts val="0"/>
-              </a:spcAft>
-            </a:pPr>
-            <a:r>
-              <a:rPr sz="1600" b="0">
-                <a:solidFill>
-                  <a:srgbClr val="556575"/>
-                </a:solidFill>
-                <a:latin typeface="Arial"/>
-              </a:rPr>
-              <a:t>Figure 1.  Six months. Four of these eight turns are things that did not work, and two are numbers this project measured, published internally and then withdrew after checking them.</a:t>
-            </a:r>
-          </a:p>
-        </p:txBody>
-      </p:sp>
-      <p:sp>
-        <p:nvSpPr>
-          <p:cNvPr id="12" name="TextBox 11"/>
-          <p:cNvSpPr txBox="1"/>
-          <p:nvPr/>
-        </p:nvSpPr>
-        <p:spPr>
-          <a:xfrm>
-            <a:off x="731520" y="10508487"/>
-            <a:ext cx="10607040" cy="365760"/>
           </a:xfrm>
           <a:prstGeom prst="rect">
             <a:avLst/>
@@ -3527,27 +3251,195 @@
               </a:spcAft>
             </a:pPr>
             <a:r>
-              <a:rPr sz="3400" b="1">
-                <a:solidFill>
-                  <a:srgbClr val="14314E"/>
+              <a:rPr sz="10200" b="1">
+                <a:solidFill>
+                  <a:srgbClr val="FFFFFF"/>
                 </a:solidFill>
                 <a:latin typeface="Arial"/>
               </a:rPr>
-              <a:t>What we collect now</a:t>
-            </a:r>
-          </a:p>
-        </p:txBody>
-      </p:sp>
-      <p:sp>
-        <p:nvSpPr>
-          <p:cNvPr id="13" name="Rectangle 12"/>
+              <a:t>How Much of This Pipeline Can the Agents Run by Themselves?</a:t>
+            </a:r>
+          </a:p>
+        </p:txBody>
+      </p:sp>
+      <p:sp>
+        <p:nvSpPr>
+          <p:cNvPr id="6" name="TextBox 5"/>
+          <p:cNvSpPr txBox="1"/>
+          <p:nvPr/>
+        </p:nvSpPr>
+        <p:spPr>
+          <a:xfrm>
+            <a:off x="731520" y="2121408"/>
+            <a:ext cx="42428160" cy="365760"/>
+          </a:xfrm>
+          <a:prstGeom prst="rect">
+            <a:avLst/>
+          </a:prstGeom>
+          <a:noFill/>
+        </p:spPr>
+        <p:txBody>
+          <a:bodyPr wrap="square" lIns="0" rIns="0" tIns="0" bIns="0">
+            <a:spAutoFit/>
+          </a:bodyPr>
+          <a:lstStyle/>
+          <a:p>
+            <a:pPr algn="l">
+              <a:lnSpc>
+                <a:spcPct val="100000"/>
+              </a:lnSpc>
+              <a:spcAft>
+                <a:spcPts val="0"/>
+              </a:spcAft>
+            </a:pPr>
+            <a:r>
+              <a:rPr sz="4000" b="1">
+                <a:solidFill>
+                  <a:srgbClr val="FFFFFF"/>
+                </a:solidFill>
+                <a:latin typeface="Arial"/>
+              </a:rPr>
+              <a:t>Harry He   ·   Hongbo Zhang</a:t>
+            </a:r>
+          </a:p>
+        </p:txBody>
+      </p:sp>
+      <p:sp>
+        <p:nvSpPr>
+          <p:cNvPr id="7" name="TextBox 6"/>
+          <p:cNvSpPr txBox="1"/>
+          <p:nvPr/>
+        </p:nvSpPr>
+        <p:spPr>
+          <a:xfrm>
+            <a:off x="731520" y="2761488"/>
+            <a:ext cx="42428160" cy="365760"/>
+          </a:xfrm>
+          <a:prstGeom prst="rect">
+            <a:avLst/>
+          </a:prstGeom>
+          <a:noFill/>
+        </p:spPr>
+        <p:txBody>
+          <a:bodyPr wrap="square" lIns="0" rIns="0" tIns="0" bIns="0">
+            <a:spAutoFit/>
+          </a:bodyPr>
+          <a:lstStyle/>
+          <a:p>
+            <a:pPr algn="l">
+              <a:lnSpc>
+                <a:spcPct val="100000"/>
+              </a:lnSpc>
+              <a:spcAft>
+                <a:spcPts val="0"/>
+              </a:spcAft>
+            </a:pPr>
+            <a:r>
+              <a:rPr sz="2400" b="0">
+                <a:solidFill>
+                  <a:srgbClr val="C2CEDA"/>
+                </a:solidFill>
+                <a:latin typeface="Arial"/>
+              </a:rPr>
+              <a:t>Department of Engineering Technology   ·   Middle Tennessee State University, Murfreesboro, TN, USA</a:t>
+            </a:r>
+          </a:p>
+        </p:txBody>
+      </p:sp>
+      <p:sp>
+        <p:nvSpPr>
+          <p:cNvPr id="8" name="TextBox 7"/>
+          <p:cNvSpPr txBox="1"/>
+          <p:nvPr/>
+        </p:nvSpPr>
+        <p:spPr>
+          <a:xfrm>
+            <a:off x="731520" y="4315968"/>
+            <a:ext cx="42428160" cy="365760"/>
+          </a:xfrm>
+          <a:prstGeom prst="rect">
+            <a:avLst/>
+          </a:prstGeom>
+          <a:noFill/>
+        </p:spPr>
+        <p:txBody>
+          <a:bodyPr wrap="square" lIns="0" rIns="0" tIns="0" bIns="0">
+            <a:spAutoFit/>
+          </a:bodyPr>
+          <a:lstStyle/>
+          <a:p>
+            <a:pPr algn="l">
+              <a:lnSpc>
+                <a:spcPct val="116000"/>
+              </a:lnSpc>
+              <a:spcAft>
+                <a:spcPts val="0"/>
+              </a:spcAft>
+            </a:pPr>
+            <a:r>
+              <a:rPr sz="3400" b="0">
+                <a:solidFill>
+                  <a:srgbClr val="1E293B"/>
+                </a:solidFill>
+                <a:latin typeface="Arial"/>
+              </a:rPr>
+              <a:t>We spent six months finding out, on our own robots and on PSC Bridges-2. The answer is that collection and training run alone, and judging does not.</a:t>
+            </a:r>
+          </a:p>
+        </p:txBody>
+      </p:sp>
+      <p:sp>
+        <p:nvSpPr>
+          <p:cNvPr id="9" name="TextBox 8"/>
+          <p:cNvSpPr txBox="1"/>
+          <p:nvPr/>
+        </p:nvSpPr>
+        <p:spPr>
+          <a:xfrm>
+            <a:off x="731520" y="5623560"/>
+            <a:ext cx="42428160" cy="365760"/>
+          </a:xfrm>
+          <a:prstGeom prst="rect">
+            <a:avLst/>
+          </a:prstGeom>
+          <a:noFill/>
+        </p:spPr>
+        <p:txBody>
+          <a:bodyPr wrap="square" lIns="0" rIns="0" tIns="0" bIns="0">
+            <a:spAutoFit/>
+          </a:bodyPr>
+          <a:lstStyle/>
+          <a:p>
+            <a:pPr algn="l">
+              <a:lnSpc>
+                <a:spcPct val="95000"/>
+              </a:lnSpc>
+              <a:spcAft>
+                <a:spcPts val="0"/>
+              </a:spcAft>
+            </a:pPr>
+            <a:r>
+              <a:rPr sz="3400" b="1">
+                <a:solidFill>
+                  <a:srgbClr val="14314E"/>
+                </a:solidFill>
+                <a:latin typeface="Arial"/>
+              </a:rPr>
+              <a:t>The route we actually took</a:t>
+            </a:r>
+          </a:p>
+        </p:txBody>
+      </p:sp>
+      <p:sp>
+        <p:nvSpPr>
+          <p:cNvPr id="10" name="Rectangle 9"/>
           <p:cNvSpPr/>
           <p:nvPr/>
         </p:nvSpPr>
         <p:spPr>
           <a:xfrm>
-            <a:off x="731520" y="11075415"/>
-            <a:ext cx="10607040" cy="27432"/>
+            <a:off x="731520" y="6184900"/>
+            <a:ext cx="42428160" cy="27432"/>
           </a:xfrm>
           <a:prstGeom prst="rect">
             <a:avLst/>
@@ -3584,22 +3476,22 @@
       </p:sp>
       <p:pic>
         <p:nvPicPr>
-          <p:cNvPr id="14" name="Picture 13" descr="l_robots.png"/>
+          <p:cNvPr id="11" name="Picture 10" descr="t_journey.png"/>
           <p:cNvPicPr>
             <a:picLocks noChangeAspect="1"/>
           </p:cNvPicPr>
           <p:nvPr/>
         </p:nvPicPr>
         <p:blipFill>
-          <a:blip r:embed="rId3"/>
+          <a:blip r:embed="rId2"/>
           <a:stretch>
             <a:fillRect/>
           </a:stretch>
         </p:blipFill>
         <p:spPr>
           <a:xfrm>
-            <a:off x="731520" y="11404600"/>
-            <a:ext cx="10607040" cy="2377440"/>
+            <a:off x="731520" y="6514084"/>
+            <a:ext cx="42428160" cy="3017520"/>
           </a:xfrm>
           <a:prstGeom prst="rect">
             <a:avLst/>
@@ -3608,14 +3500,14 @@
       </p:pic>
       <p:sp>
         <p:nvSpPr>
-          <p:cNvPr id="15" name="TextBox 14"/>
+          <p:cNvPr id="12" name="TextBox 11"/>
           <p:cNvSpPr txBox="1"/>
           <p:nvPr/>
         </p:nvSpPr>
         <p:spPr>
           <a:xfrm>
-            <a:off x="731520" y="13891767"/>
-            <a:ext cx="10607040" cy="365760"/>
+            <a:off x="731520" y="9641332"/>
+            <a:ext cx="42428160" cy="365760"/>
           </a:xfrm>
           <a:prstGeom prst="rect">
             <a:avLst/>
@@ -3643,129 +3535,21 @@
                 </a:solidFill>
                 <a:latin typeface="Arial"/>
               </a:rPr>
-              <a:t>Figure 2.  Frames as recorded, unenhanced. Robot 241 has sent 2,238 frames at 640 x 360 and 1 Hz, the laser cart 427, and 75 of the cart's were taken in a field. None of the 2,686 is labelled. The rectangle in the down camera is the cart's fixed work-zone overlay. It is drawn on every frame, including the ones with no vegetation in them.</a:t>
-            </a:r>
-          </a:p>
-        </p:txBody>
-      </p:sp>
-      <p:sp>
-        <p:nvSpPr>
-          <p:cNvPr id="16" name="TextBox 15"/>
+              <a:t>Figure 1.  Six months. Four of these eight turns are things that did not work, and two are numbers this project measured, published internally and then withdrew after checking them.</a:t>
+            </a:r>
+          </a:p>
+        </p:txBody>
+      </p:sp>
+      <p:sp>
+        <p:nvSpPr>
+          <p:cNvPr id="13" name="TextBox 12"/>
           <p:cNvSpPr txBox="1"/>
           <p:nvPr/>
         </p:nvSpPr>
         <p:spPr>
           <a:xfrm>
-            <a:off x="731520" y="15161767"/>
+            <a:off x="731520" y="10502900"/>
             <a:ext cx="10607040" cy="365760"/>
-          </a:xfrm>
-          <a:prstGeom prst="rect">
-            <a:avLst/>
-          </a:prstGeom>
-          <a:noFill/>
-        </p:spPr>
-        <p:txBody>
-          <a:bodyPr wrap="square" lIns="0" rIns="0" tIns="0" bIns="0">
-            <a:spAutoFit/>
-          </a:bodyPr>
-          <a:lstStyle/>
-          <a:p>
-            <a:pPr algn="l">
-              <a:lnSpc>
-                <a:spcPct val="122000"/>
-              </a:lnSpc>
-              <a:spcAft>
-                <a:spcPts val="2400"/>
-              </a:spcAft>
-            </a:pPr>
-            <a:r>
-              <a:rPr sz="2000" b="0">
-                <a:solidFill>
-                  <a:srgbClr val="1E293B"/>
-                </a:solidFill>
-                <a:latin typeface="Arial"/>
-              </a:rPr>
-              <a:t>Two ground vehicles drive our own crop plots. Robot 241 streams frames, position and attitude; the laser cart carries the weeder and two cameras. 2,686 frames in 26 drives, 91,955 telemetry rows across nine streams, 342 m of GPS track. None of it is labelled, and the cart writes no position at all.</a:t>
-            </a:r>
-          </a:p>
-        </p:txBody>
-      </p:sp>
-      <p:pic>
-        <p:nvPicPr>
-          <p:cNvPr id="17" name="Picture 16" descr="h_drive.png"/>
-          <p:cNvPicPr>
-            <a:picLocks noChangeAspect="1"/>
-          </p:cNvPicPr>
-          <p:nvPr/>
-        </p:nvPicPr>
-        <p:blipFill>
-          <a:blip r:embed="rId4"/>
-          <a:stretch>
-            <a:fillRect/>
-          </a:stretch>
-        </p:blipFill>
-        <p:spPr>
-          <a:xfrm>
-            <a:off x="731520" y="16706088"/>
-            <a:ext cx="10607040" cy="4023360"/>
-          </a:xfrm>
-          <a:prstGeom prst="rect">
-            <a:avLst/>
-          </a:prstGeom>
-        </p:spPr>
-      </p:pic>
-      <p:sp>
-        <p:nvSpPr>
-          <p:cNvPr id="18" name="TextBox 17"/>
-          <p:cNvSpPr txBox="1"/>
-          <p:nvPr/>
-        </p:nvSpPr>
-        <p:spPr>
-          <a:xfrm>
-            <a:off x="731520" y="20839176"/>
-            <a:ext cx="10607040" cy="365760"/>
-          </a:xfrm>
-          <a:prstGeom prst="rect">
-            <a:avLst/>
-          </a:prstGeom>
-          <a:noFill/>
-        </p:spPr>
-        <p:txBody>
-          <a:bodyPr wrap="square" lIns="0" rIns="0" tIns="0" bIns="0">
-            <a:spAutoFit/>
-          </a:bodyPr>
-          <a:lstStyle/>
-          <a:p>
-            <a:pPr algn="l">
-              <a:lnSpc>
-                <a:spcPct val="118000"/>
-              </a:lnSpc>
-              <a:spcAft>
-                <a:spcPts val="0"/>
-              </a:spcAft>
-            </a:pPr>
-            <a:r>
-              <a:rPr sz="1600" b="0">
-                <a:solidFill>
-                  <a:srgbClr val="556575"/>
-                </a:solidFill>
-                <a:latin typeface="Arial"/>
-              </a:rPr>
-              <a:t>Figure 3.  Robot 241, 2026-08-29: one 213 s pass through a crop plot. (h) GPS track from the board fix. (i) IMU heading over the same pass.</a:t>
-            </a:r>
-          </a:p>
-        </p:txBody>
-      </p:sp>
-      <p:sp>
-        <p:nvSpPr>
-          <p:cNvPr id="19" name="TextBox 18"/>
-          <p:cNvSpPr txBox="1"/>
-          <p:nvPr/>
-        </p:nvSpPr>
-        <p:spPr>
-          <a:xfrm>
-            <a:off x="11704320" y="10508487"/>
-            <a:ext cx="20482560" cy="365760"/>
           </a:xfrm>
           <a:prstGeom prst="rect">
             <a:avLst/>
@@ -3793,21 +3577,21 @@
                 </a:solidFill>
                 <a:latin typeface="Arial"/>
               </a:rPr>
-              <a:t>The part that runs alone</a:t>
-            </a:r>
-          </a:p>
-        </p:txBody>
-      </p:sp>
-      <p:sp>
-        <p:nvSpPr>
-          <p:cNvPr id="20" name="Rectangle 19"/>
+              <a:t>What we collect now</a:t>
+            </a:r>
+          </a:p>
+        </p:txBody>
+      </p:sp>
+      <p:sp>
+        <p:nvSpPr>
+          <p:cNvPr id="14" name="Rectangle 13"/>
           <p:cNvSpPr/>
           <p:nvPr/>
         </p:nvSpPr>
         <p:spPr>
           <a:xfrm>
-            <a:off x="11704320" y="11075415"/>
-            <a:ext cx="20482560" cy="27432"/>
+            <a:off x="731520" y="11064240"/>
+            <a:ext cx="10607040" cy="27432"/>
           </a:xfrm>
           <a:prstGeom prst="rect">
             <a:avLst/>
@@ -3844,22 +3628,22 @@
       </p:sp>
       <p:pic>
         <p:nvPicPr>
-          <p:cNvPr id="21" name="Picture 20" descr="n_system.png"/>
+          <p:cNvPr id="15" name="Picture 14" descr="l_robots.png"/>
           <p:cNvPicPr>
             <a:picLocks noChangeAspect="1"/>
           </p:cNvPicPr>
           <p:nvPr/>
         </p:nvPicPr>
         <p:blipFill>
-          <a:blip r:embed="rId5"/>
+          <a:blip r:embed="rId3"/>
           <a:stretch>
             <a:fillRect/>
           </a:stretch>
         </p:blipFill>
         <p:spPr>
           <a:xfrm>
-            <a:off x="11704320" y="11404600"/>
-            <a:ext cx="20482560" cy="3383280"/>
+            <a:off x="731520" y="11393424"/>
+            <a:ext cx="10607040" cy="2377440"/>
           </a:xfrm>
           <a:prstGeom prst="rect">
             <a:avLst/>
@@ -3868,14 +3652,14 @@
       </p:pic>
       <p:sp>
         <p:nvSpPr>
-          <p:cNvPr id="22" name="TextBox 21"/>
+          <p:cNvPr id="16" name="TextBox 15"/>
           <p:cNvSpPr txBox="1"/>
           <p:nvPr/>
         </p:nvSpPr>
         <p:spPr>
           <a:xfrm>
-            <a:off x="11704320" y="14897608"/>
-            <a:ext cx="20482560" cy="365760"/>
+            <a:off x="731520" y="13880591"/>
+            <a:ext cx="10607040" cy="365760"/>
           </a:xfrm>
           <a:prstGeom prst="rect">
             <a:avLst/>
@@ -3903,21 +3687,21 @@
                 </a:solidFill>
                 <a:latin typeface="Arial"/>
               </a:rPr>
-              <a:t>Figure 4.  The path as built, from a camera in a crop row to a checkpoint on the cluster. Every stage has run. Three qualifications ride on it. The collector and trainer are paused after a stop-loss on 2026-08-29. The supervisor is advisory and nothing it says is applied. And the last link is not closed: no robot frame has entered training, because none of them is labelled yet.</a:t>
-            </a:r>
-          </a:p>
-        </p:txBody>
-      </p:sp>
-      <p:sp>
-        <p:nvSpPr>
-          <p:cNvPr id="23" name="TextBox 22"/>
+              <a:t>Figure 2.  Frames as recorded, unenhanced. Robot 241 has sent 2,238 frames at 640 x 360 and 1 Hz, the laser cart 427, and 75 of the cart's were taken in a field. None of the 2,686 is labelled. The rectangle in the down camera is the cart's fixed work-zone overlay. It is drawn on every frame, including the ones with no vegetation in them.</a:t>
+            </a:r>
+          </a:p>
+        </p:txBody>
+      </p:sp>
+      <p:sp>
+        <p:nvSpPr>
+          <p:cNvPr id="17" name="TextBox 16"/>
           <p:cNvSpPr txBox="1"/>
           <p:nvPr/>
         </p:nvSpPr>
         <p:spPr>
           <a:xfrm>
-            <a:off x="11704320" y="15688056"/>
-            <a:ext cx="20482560" cy="365760"/>
+            <a:off x="731520" y="15150591"/>
+            <a:ext cx="10607040" cy="365760"/>
           </a:xfrm>
           <a:prstGeom prst="rect">
             <a:avLst/>
@@ -3935,7 +3719,7 @@
                 <a:spcPct val="122000"/>
               </a:lnSpc>
               <a:spcAft>
-                <a:spcPts val="1200"/>
+                <a:spcPts val="2400"/>
               </a:spcAft>
             </a:pPr>
             <a:r>
@@ -3945,71 +3729,29 @@
                 </a:solidFill>
                 <a:latin typeface="Arial"/>
               </a:rPr>
-              <a:t>Collection and training run without a person. A round searches public sources, filters what it finds against a DINOv2 gate, merges into a registry that excludes the holdout by content hash, trains on an H100 allocation and evaluates. Fifteen rounds went through that path and every one reported success.</a:t>
-            </a:r>
-          </a:p>
-        </p:txBody>
-      </p:sp>
-      <p:sp>
-        <p:nvSpPr>
-          <p:cNvPr id="24" name="TextBox 23"/>
-          <p:cNvSpPr txBox="1"/>
-          <p:nvPr/>
-        </p:nvSpPr>
-        <p:spPr>
-          <a:xfrm>
-            <a:off x="11704320" y="16460216"/>
-            <a:ext cx="20482560" cy="365760"/>
-          </a:xfrm>
-          <a:prstGeom prst="rect">
-            <a:avLst/>
-          </a:prstGeom>
-          <a:noFill/>
-        </p:spPr>
-        <p:txBody>
-          <a:bodyPr wrap="square" lIns="0" rIns="0" tIns="0" bIns="0">
-            <a:spAutoFit/>
-          </a:bodyPr>
-          <a:lstStyle/>
-          <a:p>
-            <a:pPr algn="l">
-              <a:lnSpc>
-                <a:spcPct val="100000"/>
-              </a:lnSpc>
-              <a:spcAft>
-                <a:spcPts val="0"/>
-              </a:spcAft>
-            </a:pPr>
-            <a:r>
-              <a:rPr sz="2400" b="1">
-                <a:solidFill>
-                  <a:srgbClr val="1E293B"/>
-                </a:solidFill>
-                <a:latin typeface="Arial"/>
-              </a:rPr>
-              <a:t>What fifteen unattended rounds actually did</a:t>
+              <a:t>Two ground vehicles drive our own crop plots. Robot 241 streams frames, position and attitude; the laser cart carries the weeder and two cameras. 2,686 frames in 26 drives, 91,955 telemetry rows across nine streams, 342 m of GPS track. None of it is labelled, and the cart writes no position at all.</a:t>
             </a:r>
           </a:p>
         </p:txBody>
       </p:sp>
       <p:pic>
         <p:nvPicPr>
-          <p:cNvPr id="25" name="Picture 24" descr="f_rounds.png"/>
+          <p:cNvPr id="18" name="Picture 17" descr="h_drive.png"/>
           <p:cNvPicPr>
             <a:picLocks noChangeAspect="1"/>
           </p:cNvPicPr>
           <p:nvPr/>
         </p:nvPicPr>
         <p:blipFill>
-          <a:blip r:embed="rId6"/>
+          <a:blip r:embed="rId4"/>
           <a:stretch>
             <a:fillRect/>
           </a:stretch>
         </p:blipFill>
         <p:spPr>
           <a:xfrm>
-            <a:off x="11704320" y="16880840"/>
-            <a:ext cx="20482560" cy="4663440"/>
+            <a:off x="731520" y="16694911"/>
+            <a:ext cx="10607040" cy="4023360"/>
           </a:xfrm>
           <a:prstGeom prst="rect">
             <a:avLst/>
@@ -4018,14 +3760,14 @@
       </p:pic>
       <p:sp>
         <p:nvSpPr>
-          <p:cNvPr id="26" name="TextBox 25"/>
+          <p:cNvPr id="19" name="TextBox 18"/>
           <p:cNvSpPr txBox="1"/>
           <p:nvPr/>
         </p:nvSpPr>
         <p:spPr>
           <a:xfrm>
-            <a:off x="11704320" y="21654008"/>
-            <a:ext cx="20482560" cy="365760"/>
+            <a:off x="731520" y="20827999"/>
+            <a:ext cx="10607040" cy="365760"/>
           </a:xfrm>
           <a:prstGeom prst="rect">
             <a:avLst/>
@@ -4053,63 +3795,21 @@
                 </a:solidFill>
                 <a:latin typeface="Arial"/>
               </a:rPr>
-              <a:t>Figure 5.  (f) Fifteen unattended rounds on a fixed holdout. (g) Round 15's exact dataset, three ways. The first two marks differ only in the starting weights, so their gap is the warm-start chain; the third is the recipe the campaign ran, whose wall-clock cap truncates the cosine, with its three seeds drawn behind it. Sigma throughout is that recipe's own seed spread, 0.0040 over three seeds, propagated to the difference being quoted. Completing the schedule is not the fix -- the second mark sits below the third.</a:t>
-            </a:r>
-          </a:p>
-        </p:txBody>
-      </p:sp>
-      <p:sp>
-        <p:nvSpPr>
-          <p:cNvPr id="27" name="TextBox 26"/>
+              <a:t>Figure 3.  Robot 241, 2026-08-29: one 213 s pass through a crop plot. (h) GPS track from the board fix. (i) IMU heading over the same pass.</a:t>
+            </a:r>
+          </a:p>
+        </p:txBody>
+      </p:sp>
+      <p:sp>
+        <p:nvSpPr>
+          <p:cNvPr id="20" name="TextBox 19"/>
           <p:cNvSpPr txBox="1"/>
           <p:nvPr/>
         </p:nvSpPr>
         <p:spPr>
           <a:xfrm>
-            <a:off x="11704320" y="22684232"/>
+            <a:off x="11704320" y="10502900"/>
             <a:ext cx="20482560" cy="365760"/>
-          </a:xfrm>
-          <a:prstGeom prst="rect">
-            <a:avLst/>
-          </a:prstGeom>
-          <a:noFill/>
-        </p:spPr>
-        <p:txBody>
-          <a:bodyPr wrap="square" lIns="0" rIns="0" tIns="0" bIns="0">
-            <a:spAutoFit/>
-          </a:bodyPr>
-          <a:lstStyle/>
-          <a:p>
-            <a:pPr algn="l">
-              <a:lnSpc>
-                <a:spcPct val="122000"/>
-              </a:lnSpc>
-              <a:spcAft>
-                <a:spcPts val="1200"/>
-              </a:spcAft>
-            </a:pPr>
-            <a:r>
-              <a:rPr sz="2000" b="0">
-                <a:solidFill>
-                  <a:srgbClr val="1E293B"/>
-                </a:solidFill>
-                <a:latin typeface="Arial"/>
-              </a:rPr>
-              <a:t>Accuracy fell the whole time. The corpus stopped growing at round three and eight rounds collected nothing while reporting success, so what was left was the chain: each round warm-started from the last one's weights. A control on round 15's own data prices that at +0.0287, 5.1 times this recipe's own seed spread. Completing the truncated schedule does not recover it, which was the obvious fix and the wrong one.</a:t>
-            </a:r>
-          </a:p>
-        </p:txBody>
-      </p:sp>
-      <p:sp>
-        <p:nvSpPr>
-          <p:cNvPr id="28" name="TextBox 27"/>
-          <p:cNvSpPr txBox="1"/>
-          <p:nvPr/>
-        </p:nvSpPr>
-        <p:spPr>
-          <a:xfrm>
-            <a:off x="32552640" y="10508487"/>
-            <a:ext cx="10607040" cy="365760"/>
           </a:xfrm>
           <a:prstGeom prst="rect">
             <a:avLst/>
@@ -4137,21 +3837,21 @@
                 </a:solidFill>
                 <a:latin typeface="Arial"/>
               </a:rPr>
-              <a:t>The part that does not</a:t>
-            </a:r>
-          </a:p>
-        </p:txBody>
-      </p:sp>
-      <p:sp>
-        <p:nvSpPr>
-          <p:cNvPr id="29" name="Rectangle 28"/>
+              <a:t>The part that runs alone</a:t>
+            </a:r>
+          </a:p>
+        </p:txBody>
+      </p:sp>
+      <p:sp>
+        <p:nvSpPr>
+          <p:cNvPr id="21" name="Rectangle 20"/>
           <p:cNvSpPr/>
           <p:nvPr/>
         </p:nvSpPr>
         <p:spPr>
           <a:xfrm>
-            <a:off x="32552640" y="11075415"/>
-            <a:ext cx="10607040" cy="27432"/>
+            <a:off x="11704320" y="11064240"/>
+            <a:ext cx="20482560" cy="27432"/>
           </a:xfrm>
           <a:prstGeom prst="rect">
             <a:avLst/>
@@ -4186,16 +3886,82 @@
           </a:p>
         </p:txBody>
       </p:sp>
-      <p:sp>
-        <p:nvSpPr>
-          <p:cNvPr id="30" name="TextBox 29"/>
+      <p:pic>
+        <p:nvPicPr>
+          <p:cNvPr id="22" name="Picture 21" descr="n_system.png"/>
+          <p:cNvPicPr>
+            <a:picLocks noChangeAspect="1"/>
+          </p:cNvPicPr>
+          <p:nvPr/>
+        </p:nvPicPr>
+        <p:blipFill>
+          <a:blip r:embed="rId5"/>
+          <a:stretch>
+            <a:fillRect/>
+          </a:stretch>
+        </p:blipFill>
+        <p:spPr>
+          <a:xfrm>
+            <a:off x="11704320" y="11393424"/>
+            <a:ext cx="20482560" cy="3383280"/>
+          </a:xfrm>
+          <a:prstGeom prst="rect">
+            <a:avLst/>
+          </a:prstGeom>
+        </p:spPr>
+      </p:pic>
+      <p:sp>
+        <p:nvSpPr>
+          <p:cNvPr id="23" name="TextBox 22"/>
           <p:cNvSpPr txBox="1"/>
           <p:nvPr/>
         </p:nvSpPr>
         <p:spPr>
           <a:xfrm>
-            <a:off x="32552640" y="11404600"/>
-            <a:ext cx="10607040" cy="365760"/>
+            <a:off x="11704320" y="14886432"/>
+            <a:ext cx="20482560" cy="365760"/>
+          </a:xfrm>
+          <a:prstGeom prst="rect">
+            <a:avLst/>
+          </a:prstGeom>
+          <a:noFill/>
+        </p:spPr>
+        <p:txBody>
+          <a:bodyPr wrap="square" lIns="0" rIns="0" tIns="0" bIns="0">
+            <a:spAutoFit/>
+          </a:bodyPr>
+          <a:lstStyle/>
+          <a:p>
+            <a:pPr algn="l">
+              <a:lnSpc>
+                <a:spcPct val="118000"/>
+              </a:lnSpc>
+              <a:spcAft>
+                <a:spcPts val="0"/>
+              </a:spcAft>
+            </a:pPr>
+            <a:r>
+              <a:rPr sz="1600" b="0">
+                <a:solidFill>
+                  <a:srgbClr val="556575"/>
+                </a:solidFill>
+                <a:latin typeface="Arial"/>
+              </a:rPr>
+              <a:t>Figure 4.  The path as built, from a camera in a crop row to a checkpoint on the cluster. Every stage has run. Three qualifications ride on it. The collector and trainer are paused after a stop-loss on 2026-08-29. The supervisor is advisory and nothing it says is applied. And the last link is not closed: no robot frame has entered training, because none of them is labelled yet.</a:t>
+            </a:r>
+          </a:p>
+        </p:txBody>
+      </p:sp>
+      <p:sp>
+        <p:nvSpPr>
+          <p:cNvPr id="24" name="TextBox 23"/>
+          <p:cNvSpPr txBox="1"/>
+          <p:nvPr/>
+        </p:nvSpPr>
+        <p:spPr>
+          <a:xfrm>
+            <a:off x="11704320" y="15676880"/>
+            <a:ext cx="20482560" cy="365760"/>
           </a:xfrm>
           <a:prstGeom prst="rect">
             <a:avLst/>
@@ -4213,7 +3979,7 @@
                 <a:spcPct val="122000"/>
               </a:lnSpc>
               <a:spcAft>
-                <a:spcPts val="2400"/>
+                <a:spcPts val="1200"/>
               </a:spcAft>
             </a:pPr>
             <a:r>
@@ -4223,27 +3989,219 @@
                 </a:solidFill>
                 <a:latin typeface="Arial"/>
               </a:rPr>
-              <a:t>Judging does not run alone yet. We froze 162 real failures out of this project's own engineering record and scored every kind of supervision we had. The watchdog the loop was running returned no decision on any of the 149 dev cases.</a:t>
-            </a:r>
-          </a:p>
-        </p:txBody>
-      </p:sp>
-      <p:sp>
-        <p:nvSpPr>
-          <p:cNvPr id="31" name="Rectangle 30"/>
+              <a:t>Collection and training run without a person. A round searches public sources, filters what it finds against a DINOv2 gate, merges into a registry that excludes the holdout by content hash, trains on an H100 allocation and evaluates. Fifteen rounds went through that path and every one reported success.</a:t>
+            </a:r>
+          </a:p>
+        </p:txBody>
+      </p:sp>
+      <p:sp>
+        <p:nvSpPr>
+          <p:cNvPr id="25" name="TextBox 24"/>
+          <p:cNvSpPr txBox="1"/>
+          <p:nvPr/>
+        </p:nvSpPr>
+        <p:spPr>
+          <a:xfrm>
+            <a:off x="11704320" y="16449040"/>
+            <a:ext cx="20482560" cy="365760"/>
+          </a:xfrm>
+          <a:prstGeom prst="rect">
+            <a:avLst/>
+          </a:prstGeom>
+          <a:noFill/>
+        </p:spPr>
+        <p:txBody>
+          <a:bodyPr wrap="square" lIns="0" rIns="0" tIns="0" bIns="0">
+            <a:spAutoFit/>
+          </a:bodyPr>
+          <a:lstStyle/>
+          <a:p>
+            <a:pPr algn="l">
+              <a:lnSpc>
+                <a:spcPct val="100000"/>
+              </a:lnSpc>
+              <a:spcAft>
+                <a:spcPts val="0"/>
+              </a:spcAft>
+            </a:pPr>
+            <a:r>
+              <a:rPr sz="2400" b="1">
+                <a:solidFill>
+                  <a:srgbClr val="1E293B"/>
+                </a:solidFill>
+                <a:latin typeface="Arial"/>
+              </a:rPr>
+              <a:t>What fifteen unattended rounds actually did</a:t>
+            </a:r>
+          </a:p>
+        </p:txBody>
+      </p:sp>
+      <p:pic>
+        <p:nvPicPr>
+          <p:cNvPr id="26" name="Picture 25" descr="f_rounds.png"/>
+          <p:cNvPicPr>
+            <a:picLocks noChangeAspect="1"/>
+          </p:cNvPicPr>
+          <p:nvPr/>
+        </p:nvPicPr>
+        <p:blipFill>
+          <a:blip r:embed="rId6"/>
+          <a:stretch>
+            <a:fillRect/>
+          </a:stretch>
+        </p:blipFill>
+        <p:spPr>
+          <a:xfrm>
+            <a:off x="11704320" y="16869664"/>
+            <a:ext cx="20482560" cy="4663440"/>
+          </a:xfrm>
+          <a:prstGeom prst="rect">
+            <a:avLst/>
+          </a:prstGeom>
+        </p:spPr>
+      </p:pic>
+      <p:sp>
+        <p:nvSpPr>
+          <p:cNvPr id="27" name="TextBox 26"/>
+          <p:cNvSpPr txBox="1"/>
+          <p:nvPr/>
+        </p:nvSpPr>
+        <p:spPr>
+          <a:xfrm>
+            <a:off x="11704320" y="21642832"/>
+            <a:ext cx="20482560" cy="365760"/>
+          </a:xfrm>
+          <a:prstGeom prst="rect">
+            <a:avLst/>
+          </a:prstGeom>
+          <a:noFill/>
+        </p:spPr>
+        <p:txBody>
+          <a:bodyPr wrap="square" lIns="0" rIns="0" tIns="0" bIns="0">
+            <a:spAutoFit/>
+          </a:bodyPr>
+          <a:lstStyle/>
+          <a:p>
+            <a:pPr algn="l">
+              <a:lnSpc>
+                <a:spcPct val="118000"/>
+              </a:lnSpc>
+              <a:spcAft>
+                <a:spcPts val="0"/>
+              </a:spcAft>
+            </a:pPr>
+            <a:r>
+              <a:rPr sz="1600" b="0">
+                <a:solidFill>
+                  <a:srgbClr val="556575"/>
+                </a:solidFill>
+                <a:latin typeface="Arial"/>
+              </a:rPr>
+              <a:t>Figure 5.  (f) Fifteen unattended rounds on a fixed holdout. (g) Round 15's exact dataset, three ways. The first two marks differ only in the starting weights, so their gap is the warm-start chain; the third is the recipe the campaign ran, whose wall-clock cap truncates the cosine, with its three seeds drawn behind it. Sigma throughout is that recipe's own seed spread, 0.0040 over three seeds, propagated to the difference being quoted. Completing the schedule is not the fix -- the second mark sits below the third.</a:t>
+            </a:r>
+          </a:p>
+        </p:txBody>
+      </p:sp>
+      <p:sp>
+        <p:nvSpPr>
+          <p:cNvPr id="28" name="TextBox 27"/>
+          <p:cNvSpPr txBox="1"/>
+          <p:nvPr/>
+        </p:nvSpPr>
+        <p:spPr>
+          <a:xfrm>
+            <a:off x="11704320" y="22673056"/>
+            <a:ext cx="20482560" cy="365760"/>
+          </a:xfrm>
+          <a:prstGeom prst="rect">
+            <a:avLst/>
+          </a:prstGeom>
+          <a:noFill/>
+        </p:spPr>
+        <p:txBody>
+          <a:bodyPr wrap="square" lIns="0" rIns="0" tIns="0" bIns="0">
+            <a:spAutoFit/>
+          </a:bodyPr>
+          <a:lstStyle/>
+          <a:p>
+            <a:pPr algn="l">
+              <a:lnSpc>
+                <a:spcPct val="122000"/>
+              </a:lnSpc>
+              <a:spcAft>
+                <a:spcPts val="1200"/>
+              </a:spcAft>
+            </a:pPr>
+            <a:r>
+              <a:rPr sz="2000" b="0">
+                <a:solidFill>
+                  <a:srgbClr val="1E293B"/>
+                </a:solidFill>
+                <a:latin typeface="Arial"/>
+              </a:rPr>
+              <a:t>Accuracy fell the whole time. The corpus stopped growing at round three and eight rounds collected nothing while reporting success, so what was left was the chain: each round warm-started from the last one's weights. A control on round 15's own data prices that at +0.0287, 5.1 times this recipe's own seed spread. Completing the truncated schedule does not recover it, which was the obvious fix and the wrong one.</a:t>
+            </a:r>
+          </a:p>
+        </p:txBody>
+      </p:sp>
+      <p:sp>
+        <p:nvSpPr>
+          <p:cNvPr id="29" name="TextBox 28"/>
+          <p:cNvSpPr txBox="1"/>
+          <p:nvPr/>
+        </p:nvSpPr>
+        <p:spPr>
+          <a:xfrm>
+            <a:off x="32552640" y="10502900"/>
+            <a:ext cx="10607040" cy="365760"/>
+          </a:xfrm>
+          <a:prstGeom prst="rect">
+            <a:avLst/>
+          </a:prstGeom>
+          <a:noFill/>
+        </p:spPr>
+        <p:txBody>
+          <a:bodyPr wrap="square" lIns="0" rIns="0" tIns="0" bIns="0">
+            <a:spAutoFit/>
+          </a:bodyPr>
+          <a:lstStyle/>
+          <a:p>
+            <a:pPr algn="l">
+              <a:lnSpc>
+                <a:spcPct val="95000"/>
+              </a:lnSpc>
+              <a:spcAft>
+                <a:spcPts val="0"/>
+              </a:spcAft>
+            </a:pPr>
+            <a:r>
+              <a:rPr sz="3400" b="1">
+                <a:solidFill>
+                  <a:srgbClr val="14314E"/>
+                </a:solidFill>
+                <a:latin typeface="Arial"/>
+              </a:rPr>
+              <a:t>The part that does not</a:t>
+            </a:r>
+          </a:p>
+        </p:txBody>
+      </p:sp>
+      <p:sp>
+        <p:nvSpPr>
+          <p:cNvPr id="30" name="Rectangle 29"/>
           <p:cNvSpPr/>
           <p:nvPr/>
         </p:nvSpPr>
         <p:spPr>
           <a:xfrm>
-            <a:off x="32552640" y="12639039"/>
-            <a:ext cx="10607040" cy="23774"/>
+            <a:off x="32552640" y="11064240"/>
+            <a:ext cx="10607040" cy="27432"/>
           </a:xfrm>
           <a:prstGeom prst="rect">
             <a:avLst/>
           </a:prstGeom>
           <a:solidFill>
-            <a:srgbClr val="1E293B"/>
+            <a:srgbClr val="1C6FB5"/>
           </a:solidFill>
           <a:ln>
             <a:noFill/>
@@ -4274,14 +4232,14 @@
       </p:sp>
       <p:sp>
         <p:nvSpPr>
-          <p:cNvPr id="32" name="TextBox 31"/>
+          <p:cNvPr id="31" name="TextBox 30"/>
           <p:cNvSpPr txBox="1"/>
           <p:nvPr/>
         </p:nvSpPr>
         <p:spPr>
           <a:xfrm>
-            <a:off x="32552640" y="12757912"/>
-            <a:ext cx="4030675" cy="365760"/>
+            <a:off x="32552640" y="11393424"/>
+            <a:ext cx="10607040" cy="365760"/>
           </a:xfrm>
           <a:prstGeom prst="rect">
             <a:avLst/>
@@ -4296,166 +4254,40 @@
           <a:p>
             <a:pPr algn="l">
               <a:lnSpc>
-                <a:spcPct val="100000"/>
+                <a:spcPct val="122000"/>
               </a:lnSpc>
               <a:spcAft>
-                <a:spcPts val="0"/>
+                <a:spcPts val="2400"/>
               </a:spcAft>
             </a:pPr>
             <a:r>
-              <a:rPr sz="1550" b="1">
+              <a:rPr sz="2000" b="0">
                 <a:solidFill>
                   <a:srgbClr val="1E293B"/>
                 </a:solidFill>
                 <a:latin typeface="Arial"/>
               </a:rPr>
-              <a:t>reviewer</a:t>
-            </a:r>
-          </a:p>
-        </p:txBody>
-      </p:sp>
-      <p:sp>
-        <p:nvSpPr>
-          <p:cNvPr id="33" name="TextBox 32"/>
-          <p:cNvSpPr txBox="1"/>
-          <p:nvPr/>
-        </p:nvSpPr>
-        <p:spPr>
-          <a:xfrm>
-            <a:off x="36583315" y="12757912"/>
-            <a:ext cx="2227478" cy="365760"/>
-          </a:xfrm>
-          <a:prstGeom prst="rect">
-            <a:avLst/>
-          </a:prstGeom>
-          <a:noFill/>
-        </p:spPr>
-        <p:txBody>
-          <a:bodyPr wrap="square" lIns="0" rIns="0" tIns="0" bIns="0">
-            <a:spAutoFit/>
-          </a:bodyPr>
-          <a:lstStyle/>
-          <a:p>
-            <a:pPr algn="r">
-              <a:lnSpc>
-                <a:spcPct val="100000"/>
-              </a:lnSpc>
-              <a:spcAft>
-                <a:spcPts val="0"/>
-              </a:spcAft>
-            </a:pPr>
-            <a:r>
-              <a:rPr sz="1550" b="1">
-                <a:solidFill>
-                  <a:srgbClr val="1E293B"/>
-                </a:solidFill>
-                <a:latin typeface="Arial"/>
-              </a:rPr>
-              <a:t>recall</a:t>
-            </a:r>
-          </a:p>
-        </p:txBody>
-      </p:sp>
-      <p:sp>
-        <p:nvSpPr>
-          <p:cNvPr id="34" name="TextBox 33"/>
-          <p:cNvSpPr txBox="1"/>
-          <p:nvPr/>
-        </p:nvSpPr>
-        <p:spPr>
-          <a:xfrm>
-            <a:off x="38810793" y="12757912"/>
-            <a:ext cx="2227478" cy="365760"/>
-          </a:xfrm>
-          <a:prstGeom prst="rect">
-            <a:avLst/>
-          </a:prstGeom>
-          <a:noFill/>
-        </p:spPr>
-        <p:txBody>
-          <a:bodyPr wrap="square" lIns="0" rIns="0" tIns="0" bIns="0">
-            <a:spAutoFit/>
-          </a:bodyPr>
-          <a:lstStyle/>
-          <a:p>
-            <a:pPr algn="r">
-              <a:lnSpc>
-                <a:spcPct val="100000"/>
-              </a:lnSpc>
-              <a:spcAft>
-                <a:spcPts val="0"/>
-              </a:spcAft>
-            </a:pPr>
-            <a:r>
-              <a:rPr sz="1550" b="1">
-                <a:solidFill>
-                  <a:srgbClr val="1E293B"/>
-                </a:solidFill>
-                <a:latin typeface="Arial"/>
-              </a:rPr>
-              <a:t>grounded</a:t>
-            </a:r>
-          </a:p>
-        </p:txBody>
-      </p:sp>
-      <p:sp>
-        <p:nvSpPr>
-          <p:cNvPr id="35" name="TextBox 34"/>
-          <p:cNvSpPr txBox="1"/>
-          <p:nvPr/>
-        </p:nvSpPr>
-        <p:spPr>
-          <a:xfrm>
-            <a:off x="41038272" y="12757912"/>
-            <a:ext cx="2121408" cy="365760"/>
-          </a:xfrm>
-          <a:prstGeom prst="rect">
-            <a:avLst/>
-          </a:prstGeom>
-          <a:noFill/>
-        </p:spPr>
-        <p:txBody>
-          <a:bodyPr wrap="square" lIns="0" rIns="0" tIns="0" bIns="0">
-            <a:spAutoFit/>
-          </a:bodyPr>
-          <a:lstStyle/>
-          <a:p>
-            <a:pPr algn="r">
-              <a:lnSpc>
-                <a:spcPct val="100000"/>
-              </a:lnSpc>
-              <a:spcAft>
-                <a:spcPts val="0"/>
-              </a:spcAft>
-            </a:pPr>
-            <a:r>
-              <a:rPr sz="1550" b="1">
-                <a:solidFill>
-                  <a:srgbClr val="1E293B"/>
-                </a:solidFill>
-                <a:latin typeface="Arial"/>
-              </a:rPr>
-              <a:t>incidents</a:t>
-            </a:r>
-          </a:p>
-        </p:txBody>
-      </p:sp>
-      <p:sp>
-        <p:nvSpPr>
-          <p:cNvPr id="36" name="Rectangle 35"/>
+              <a:t>Judging does not run alone yet. We froze 162 real failures out of this project's own engineering record and scored every kind of supervision we had. The watchdog the loop was running returned no decision on any of the 149 dev cases.</a:t>
+            </a:r>
+          </a:p>
+        </p:txBody>
+      </p:sp>
+      <p:sp>
+        <p:nvSpPr>
+          <p:cNvPr id="32" name="Rectangle 31"/>
           <p:cNvSpPr/>
           <p:nvPr/>
         </p:nvSpPr>
         <p:spPr>
           <a:xfrm>
-            <a:off x="32552640" y="13123672"/>
-            <a:ext cx="10607040" cy="14630"/>
+            <a:off x="32552640" y="12627863"/>
+            <a:ext cx="10607040" cy="23774"/>
           </a:xfrm>
           <a:prstGeom prst="rect">
             <a:avLst/>
           </a:prstGeom>
           <a:solidFill>
-            <a:srgbClr val="C2CEDA"/>
+            <a:srgbClr val="1E293B"/>
           </a:solidFill>
           <a:ln>
             <a:noFill/>
@@ -4486,13 +4318,13 @@
       </p:sp>
       <p:sp>
         <p:nvSpPr>
-          <p:cNvPr id="37" name="TextBox 36"/>
+          <p:cNvPr id="33" name="TextBox 32"/>
           <p:cNvSpPr txBox="1"/>
           <p:nvPr/>
         </p:nvSpPr>
         <p:spPr>
           <a:xfrm>
-            <a:off x="32552640" y="13233400"/>
+            <a:off x="32552640" y="12746736"/>
             <a:ext cx="4030675" cy="365760"/>
           </a:xfrm>
           <a:prstGeom prst="rect">
@@ -4515,26 +4347,26 @@
               </a:spcAft>
             </a:pPr>
             <a:r>
-              <a:rPr sz="1700" b="0">
+              <a:rPr sz="1550" b="1">
                 <a:solidFill>
                   <a:srgbClr val="1E293B"/>
                 </a:solidFill>
                 <a:latin typeface="Arial"/>
               </a:rPr>
-              <a:t>scripted watchdog</a:t>
-            </a:r>
-          </a:p>
-        </p:txBody>
-      </p:sp>
-      <p:sp>
-        <p:nvSpPr>
-          <p:cNvPr id="38" name="TextBox 37"/>
+              <a:t>reviewer</a:t>
+            </a:r>
+          </a:p>
+        </p:txBody>
+      </p:sp>
+      <p:sp>
+        <p:nvSpPr>
+          <p:cNvPr id="34" name="TextBox 33"/>
           <p:cNvSpPr txBox="1"/>
           <p:nvPr/>
         </p:nvSpPr>
         <p:spPr>
           <a:xfrm>
-            <a:off x="36583315" y="13233400"/>
+            <a:off x="36583315" y="12746736"/>
             <a:ext cx="2227478" cy="365760"/>
           </a:xfrm>
           <a:prstGeom prst="rect">
@@ -4557,26 +4389,26 @@
               </a:spcAft>
             </a:pPr>
             <a:r>
-              <a:rPr sz="1700" b="0">
+              <a:rPr sz="1550" b="1">
                 <a:solidFill>
                   <a:srgbClr val="1E293B"/>
                 </a:solidFill>
                 <a:latin typeface="Arial"/>
               </a:rPr>
-              <a:t>no decision</a:t>
-            </a:r>
-          </a:p>
-        </p:txBody>
-      </p:sp>
-      <p:sp>
-        <p:nvSpPr>
-          <p:cNvPr id="39" name="TextBox 38"/>
+              <a:t>recall</a:t>
+            </a:r>
+          </a:p>
+        </p:txBody>
+      </p:sp>
+      <p:sp>
+        <p:nvSpPr>
+          <p:cNvPr id="35" name="TextBox 34"/>
           <p:cNvSpPr txBox="1"/>
           <p:nvPr/>
         </p:nvSpPr>
         <p:spPr>
           <a:xfrm>
-            <a:off x="38810793" y="13233400"/>
+            <a:off x="38810793" y="12746736"/>
             <a:ext cx="2227478" cy="365760"/>
           </a:xfrm>
           <a:prstGeom prst="rect">
@@ -4599,26 +4431,26 @@
               </a:spcAft>
             </a:pPr>
             <a:r>
-              <a:rPr sz="1700" b="0">
+              <a:rPr sz="1550" b="1">
                 <a:solidFill>
                   <a:srgbClr val="1E293B"/>
                 </a:solidFill>
                 <a:latin typeface="Arial"/>
               </a:rPr>
-              <a:t>—</a:t>
-            </a:r>
-          </a:p>
-        </p:txBody>
-      </p:sp>
-      <p:sp>
-        <p:nvSpPr>
-          <p:cNvPr id="40" name="TextBox 39"/>
+              <a:t>grounded</a:t>
+            </a:r>
+          </a:p>
+        </p:txBody>
+      </p:sp>
+      <p:sp>
+        <p:nvSpPr>
+          <p:cNvPr id="36" name="TextBox 35"/>
           <p:cNvSpPr txBox="1"/>
           <p:nvPr/>
         </p:nvSpPr>
         <p:spPr>
           <a:xfrm>
-            <a:off x="41038272" y="13233400"/>
+            <a:off x="41038272" y="12746736"/>
             <a:ext cx="2121408" cy="365760"/>
           </a:xfrm>
           <a:prstGeom prst="rect">
@@ -4641,705 +4473,33 @@
               </a:spcAft>
             </a:pPr>
             <a:r>
-              <a:rPr sz="1700" b="0">
+              <a:rPr sz="1550" b="1">
                 <a:solidFill>
                   <a:srgbClr val="1E293B"/>
                 </a:solidFill>
                 <a:latin typeface="Arial"/>
               </a:rPr>
-              <a:t>—</a:t>
-            </a:r>
-          </a:p>
-        </p:txBody>
-      </p:sp>
-      <p:sp>
-        <p:nvSpPr>
-          <p:cNvPr id="41" name="TextBox 40"/>
-          <p:cNvSpPr txBox="1"/>
-          <p:nvPr/>
-        </p:nvSpPr>
-        <p:spPr>
-          <a:xfrm>
-            <a:off x="32552640" y="13635735"/>
-            <a:ext cx="4030675" cy="365760"/>
-          </a:xfrm>
-          <a:prstGeom prst="rect">
-            <a:avLst/>
-          </a:prstGeom>
-          <a:noFill/>
-        </p:spPr>
-        <p:txBody>
-          <a:bodyPr wrap="square" lIns="0" rIns="0" tIns="0" bIns="0">
-            <a:spAutoFit/>
-          </a:bodyPr>
-          <a:lstStyle/>
-          <a:p>
-            <a:pPr algn="l">
-              <a:lnSpc>
-                <a:spcPct val="100000"/>
-              </a:lnSpc>
-              <a:spcAft>
-                <a:spcPts val="0"/>
-              </a:spcAft>
-            </a:pPr>
-            <a:r>
-              <a:rPr sz="1700" b="0">
-                <a:solidFill>
-                  <a:srgbClr val="1E293B"/>
-                </a:solidFill>
-                <a:latin typeface="Arial"/>
-              </a:rPr>
-              <a:t>12 rules</a:t>
-            </a:r>
-          </a:p>
-        </p:txBody>
-      </p:sp>
-      <p:sp>
-        <p:nvSpPr>
-          <p:cNvPr id="42" name="TextBox 41"/>
-          <p:cNvSpPr txBox="1"/>
-          <p:nvPr/>
-        </p:nvSpPr>
-        <p:spPr>
-          <a:xfrm>
-            <a:off x="36583315" y="13635735"/>
-            <a:ext cx="2227478" cy="365760"/>
-          </a:xfrm>
-          <a:prstGeom prst="rect">
-            <a:avLst/>
-          </a:prstGeom>
-          <a:noFill/>
-        </p:spPr>
-        <p:txBody>
-          <a:bodyPr wrap="square" lIns="0" rIns="0" tIns="0" bIns="0">
-            <a:spAutoFit/>
-          </a:bodyPr>
-          <a:lstStyle/>
-          <a:p>
-            <a:pPr algn="r">
-              <a:lnSpc>
-                <a:spcPct val="100000"/>
-              </a:lnSpc>
-              <a:spcAft>
-                <a:spcPts val="0"/>
-              </a:spcAft>
-            </a:pPr>
-            <a:r>
-              <a:rPr sz="1700" b="0">
-                <a:solidFill>
-                  <a:srgbClr val="1E293B"/>
-                </a:solidFill>
-                <a:latin typeface="Arial"/>
-              </a:rPr>
-              <a:t>0.095</a:t>
-            </a:r>
-          </a:p>
-        </p:txBody>
-      </p:sp>
-      <p:sp>
-        <p:nvSpPr>
-          <p:cNvPr id="43" name="TextBox 42"/>
-          <p:cNvSpPr txBox="1"/>
-          <p:nvPr/>
-        </p:nvSpPr>
-        <p:spPr>
-          <a:xfrm>
-            <a:off x="38810793" y="13635735"/>
-            <a:ext cx="2227478" cy="365760"/>
-          </a:xfrm>
-          <a:prstGeom prst="rect">
-            <a:avLst/>
-          </a:prstGeom>
-          <a:noFill/>
-        </p:spPr>
-        <p:txBody>
-          <a:bodyPr wrap="square" lIns="0" rIns="0" tIns="0" bIns="0">
-            <a:spAutoFit/>
-          </a:bodyPr>
-          <a:lstStyle/>
-          <a:p>
-            <a:pPr algn="r">
-              <a:lnSpc>
-                <a:spcPct val="100000"/>
-              </a:lnSpc>
-              <a:spcAft>
-                <a:spcPts val="0"/>
-              </a:spcAft>
-            </a:pPr>
-            <a:r>
-              <a:rPr sz="1700" b="0">
-                <a:solidFill>
-                  <a:srgbClr val="1E293B"/>
-                </a:solidFill>
-                <a:latin typeface="Arial"/>
-              </a:rPr>
-              <a:t>0.095</a:t>
-            </a:r>
-          </a:p>
-        </p:txBody>
-      </p:sp>
-      <p:sp>
-        <p:nvSpPr>
-          <p:cNvPr id="44" name="TextBox 43"/>
-          <p:cNvSpPr txBox="1"/>
-          <p:nvPr/>
-        </p:nvSpPr>
-        <p:spPr>
-          <a:xfrm>
-            <a:off x="41038272" y="13635735"/>
-            <a:ext cx="2121408" cy="365760"/>
-          </a:xfrm>
-          <a:prstGeom prst="rect">
-            <a:avLst/>
-          </a:prstGeom>
-          <a:noFill/>
-        </p:spPr>
-        <p:txBody>
-          <a:bodyPr wrap="square" lIns="0" rIns="0" tIns="0" bIns="0">
-            <a:spAutoFit/>
-          </a:bodyPr>
-          <a:lstStyle/>
-          <a:p>
-            <a:pPr algn="r">
-              <a:lnSpc>
-                <a:spcPct val="100000"/>
-              </a:lnSpc>
-              <a:spcAft>
-                <a:spcPts val="0"/>
-              </a:spcAft>
-            </a:pPr>
-            <a:r>
-              <a:rPr sz="1700" b="0">
-                <a:solidFill>
-                  <a:srgbClr val="1E293B"/>
-                </a:solidFill>
-                <a:latin typeface="Arial"/>
-              </a:rPr>
-              <a:t>116</a:t>
-            </a:r>
-          </a:p>
-        </p:txBody>
-      </p:sp>
-      <p:sp>
-        <p:nvSpPr>
-          <p:cNvPr id="45" name="TextBox 44"/>
-          <p:cNvSpPr txBox="1"/>
-          <p:nvPr/>
-        </p:nvSpPr>
-        <p:spPr>
-          <a:xfrm>
-            <a:off x="32552640" y="14038071"/>
-            <a:ext cx="4030675" cy="365760"/>
-          </a:xfrm>
-          <a:prstGeom prst="rect">
-            <a:avLst/>
-          </a:prstGeom>
-          <a:noFill/>
-        </p:spPr>
-        <p:txBody>
-          <a:bodyPr wrap="square" lIns="0" rIns="0" tIns="0" bIns="0">
-            <a:spAutoFit/>
-          </a:bodyPr>
-          <a:lstStyle/>
-          <a:p>
-            <a:pPr algn="l">
-              <a:lnSpc>
-                <a:spcPct val="100000"/>
-              </a:lnSpc>
-              <a:spcAft>
-                <a:spcPts val="0"/>
-              </a:spcAft>
-            </a:pPr>
-            <a:r>
-              <a:rPr sz="1700" b="0">
-                <a:solidFill>
-                  <a:srgbClr val="1E293B"/>
-                </a:solidFill>
-                <a:latin typeface="Arial"/>
-              </a:rPr>
-              <a:t>Qwen2.5-7B</a:t>
-            </a:r>
-          </a:p>
-        </p:txBody>
-      </p:sp>
-      <p:sp>
-        <p:nvSpPr>
-          <p:cNvPr id="46" name="TextBox 45"/>
-          <p:cNvSpPr txBox="1"/>
-          <p:nvPr/>
-        </p:nvSpPr>
-        <p:spPr>
-          <a:xfrm>
-            <a:off x="36583315" y="14038071"/>
-            <a:ext cx="2227478" cy="365760"/>
-          </a:xfrm>
-          <a:prstGeom prst="rect">
-            <a:avLst/>
-          </a:prstGeom>
-          <a:noFill/>
-        </p:spPr>
-        <p:txBody>
-          <a:bodyPr wrap="square" lIns="0" rIns="0" tIns="0" bIns="0">
-            <a:spAutoFit/>
-          </a:bodyPr>
-          <a:lstStyle/>
-          <a:p>
-            <a:pPr algn="r">
-              <a:lnSpc>
-                <a:spcPct val="100000"/>
-              </a:lnSpc>
-              <a:spcAft>
-                <a:spcPts val="0"/>
-              </a:spcAft>
-            </a:pPr>
-            <a:r>
-              <a:rPr sz="1700" b="0">
-                <a:solidFill>
-                  <a:srgbClr val="1E293B"/>
-                </a:solidFill>
-                <a:latin typeface="Arial"/>
-              </a:rPr>
-              <a:t>0.823</a:t>
-            </a:r>
-          </a:p>
-        </p:txBody>
-      </p:sp>
-      <p:sp>
-        <p:nvSpPr>
-          <p:cNvPr id="47" name="TextBox 46"/>
-          <p:cNvSpPr txBox="1"/>
-          <p:nvPr/>
-        </p:nvSpPr>
-        <p:spPr>
-          <a:xfrm>
-            <a:off x="38810793" y="14038071"/>
-            <a:ext cx="2227478" cy="365760"/>
-          </a:xfrm>
-          <a:prstGeom prst="rect">
-            <a:avLst/>
-          </a:prstGeom>
-          <a:noFill/>
-        </p:spPr>
-        <p:txBody>
-          <a:bodyPr wrap="square" lIns="0" rIns="0" tIns="0" bIns="0">
-            <a:spAutoFit/>
-          </a:bodyPr>
-          <a:lstStyle/>
-          <a:p>
-            <a:pPr algn="r">
-              <a:lnSpc>
-                <a:spcPct val="100000"/>
-              </a:lnSpc>
-              <a:spcAft>
-                <a:spcPts val="0"/>
-              </a:spcAft>
-            </a:pPr>
-            <a:r>
-              <a:rPr sz="1700" b="0">
-                <a:solidFill>
-                  <a:srgbClr val="1E293B"/>
-                </a:solidFill>
-                <a:latin typeface="Arial"/>
-              </a:rPr>
-              <a:t>0.274</a:t>
-            </a:r>
-          </a:p>
-        </p:txBody>
-      </p:sp>
-      <p:sp>
-        <p:nvSpPr>
-          <p:cNvPr id="48" name="TextBox 47"/>
-          <p:cNvSpPr txBox="1"/>
-          <p:nvPr/>
-        </p:nvSpPr>
-        <p:spPr>
-          <a:xfrm>
-            <a:off x="41038272" y="14038071"/>
-            <a:ext cx="2121408" cy="365760"/>
-          </a:xfrm>
-          <a:prstGeom prst="rect">
-            <a:avLst/>
-          </a:prstGeom>
-          <a:noFill/>
-        </p:spPr>
-        <p:txBody>
-          <a:bodyPr wrap="square" lIns="0" rIns="0" tIns="0" bIns="0">
-            <a:spAutoFit/>
-          </a:bodyPr>
-          <a:lstStyle/>
-          <a:p>
-            <a:pPr algn="r">
-              <a:lnSpc>
-                <a:spcPct val="100000"/>
-              </a:lnSpc>
-              <a:spcAft>
-                <a:spcPts val="0"/>
-              </a:spcAft>
-            </a:pPr>
-            <a:r>
-              <a:rPr sz="1700" b="0">
-                <a:solidFill>
-                  <a:srgbClr val="1E293B"/>
-                </a:solidFill>
-                <a:latin typeface="Arial"/>
-              </a:rPr>
-              <a:t>113</a:t>
-            </a:r>
-          </a:p>
-        </p:txBody>
-      </p:sp>
-      <p:sp>
-        <p:nvSpPr>
-          <p:cNvPr id="49" name="TextBox 48"/>
-          <p:cNvSpPr txBox="1"/>
-          <p:nvPr/>
-        </p:nvSpPr>
-        <p:spPr>
-          <a:xfrm>
-            <a:off x="32552640" y="14440407"/>
-            <a:ext cx="4030675" cy="365760"/>
-          </a:xfrm>
-          <a:prstGeom prst="rect">
-            <a:avLst/>
-          </a:prstGeom>
-          <a:noFill/>
-        </p:spPr>
-        <p:txBody>
-          <a:bodyPr wrap="square" lIns="0" rIns="0" tIns="0" bIns="0">
-            <a:spAutoFit/>
-          </a:bodyPr>
-          <a:lstStyle/>
-          <a:p>
-            <a:pPr algn="l">
-              <a:lnSpc>
-                <a:spcPct val="100000"/>
-              </a:lnSpc>
-              <a:spcAft>
-                <a:spcPts val="0"/>
-              </a:spcAft>
-            </a:pPr>
-            <a:r>
-              <a:rPr sz="1700" b="0">
-                <a:solidFill>
-                  <a:srgbClr val="1E293B"/>
-                </a:solidFill>
-                <a:latin typeface="Arial"/>
-              </a:rPr>
-              <a:t>Qwen3-14B</a:t>
-            </a:r>
-          </a:p>
-        </p:txBody>
-      </p:sp>
-      <p:sp>
-        <p:nvSpPr>
-          <p:cNvPr id="50" name="TextBox 49"/>
-          <p:cNvSpPr txBox="1"/>
-          <p:nvPr/>
-        </p:nvSpPr>
-        <p:spPr>
-          <a:xfrm>
-            <a:off x="36583315" y="14440407"/>
-            <a:ext cx="2227478" cy="365760"/>
-          </a:xfrm>
-          <a:prstGeom prst="rect">
-            <a:avLst/>
-          </a:prstGeom>
-          <a:noFill/>
-        </p:spPr>
-        <p:txBody>
-          <a:bodyPr wrap="square" lIns="0" rIns="0" tIns="0" bIns="0">
-            <a:spAutoFit/>
-          </a:bodyPr>
-          <a:lstStyle/>
-          <a:p>
-            <a:pPr algn="r">
-              <a:lnSpc>
-                <a:spcPct val="100000"/>
-              </a:lnSpc>
-              <a:spcAft>
-                <a:spcPts val="0"/>
-              </a:spcAft>
-            </a:pPr>
-            <a:r>
-              <a:rPr sz="1700" b="0">
-                <a:solidFill>
-                  <a:srgbClr val="1E293B"/>
-                </a:solidFill>
-                <a:latin typeface="Arial"/>
-              </a:rPr>
-              <a:t>0.675</a:t>
-            </a:r>
-          </a:p>
-        </p:txBody>
-      </p:sp>
-      <p:sp>
-        <p:nvSpPr>
-          <p:cNvPr id="51" name="TextBox 50"/>
-          <p:cNvSpPr txBox="1"/>
-          <p:nvPr/>
-        </p:nvSpPr>
-        <p:spPr>
-          <a:xfrm>
-            <a:off x="38810793" y="14440407"/>
-            <a:ext cx="2227478" cy="365760"/>
-          </a:xfrm>
-          <a:prstGeom prst="rect">
-            <a:avLst/>
-          </a:prstGeom>
-          <a:noFill/>
-        </p:spPr>
-        <p:txBody>
-          <a:bodyPr wrap="square" lIns="0" rIns="0" tIns="0" bIns="0">
-            <a:spAutoFit/>
-          </a:bodyPr>
-          <a:lstStyle/>
-          <a:p>
-            <a:pPr algn="r">
-              <a:lnSpc>
-                <a:spcPct val="100000"/>
-              </a:lnSpc>
-              <a:spcAft>
-                <a:spcPts val="0"/>
-              </a:spcAft>
-            </a:pPr>
-            <a:r>
-              <a:rPr sz="1700" b="0">
-                <a:solidFill>
-                  <a:srgbClr val="1E293B"/>
-                </a:solidFill>
-                <a:latin typeface="Arial"/>
-              </a:rPr>
-              <a:t>0.614</a:t>
-            </a:r>
-          </a:p>
-        </p:txBody>
-      </p:sp>
-      <p:sp>
-        <p:nvSpPr>
-          <p:cNvPr id="52" name="TextBox 51"/>
-          <p:cNvSpPr txBox="1"/>
-          <p:nvPr/>
-        </p:nvSpPr>
-        <p:spPr>
-          <a:xfrm>
-            <a:off x="41038272" y="14440407"/>
-            <a:ext cx="2121408" cy="365760"/>
-          </a:xfrm>
-          <a:prstGeom prst="rect">
-            <a:avLst/>
-          </a:prstGeom>
-          <a:noFill/>
-        </p:spPr>
-        <p:txBody>
-          <a:bodyPr wrap="square" lIns="0" rIns="0" tIns="0" bIns="0">
-            <a:spAutoFit/>
-          </a:bodyPr>
-          <a:lstStyle/>
-          <a:p>
-            <a:pPr algn="r">
-              <a:lnSpc>
-                <a:spcPct val="100000"/>
-              </a:lnSpc>
-              <a:spcAft>
-                <a:spcPts val="0"/>
-              </a:spcAft>
-            </a:pPr>
-            <a:r>
-              <a:rPr sz="1700" b="0">
-                <a:solidFill>
-                  <a:srgbClr val="1E293B"/>
-                </a:solidFill>
-                <a:latin typeface="Arial"/>
-              </a:rPr>
-              <a:t>114</a:t>
-            </a:r>
-          </a:p>
-        </p:txBody>
-      </p:sp>
-      <p:sp>
-        <p:nvSpPr>
-          <p:cNvPr id="53" name="TextBox 52"/>
-          <p:cNvSpPr txBox="1"/>
-          <p:nvPr/>
-        </p:nvSpPr>
-        <p:spPr>
-          <a:xfrm>
-            <a:off x="32552640" y="14842743"/>
-            <a:ext cx="4030675" cy="365760"/>
-          </a:xfrm>
-          <a:prstGeom prst="rect">
-            <a:avLst/>
-          </a:prstGeom>
-          <a:noFill/>
-        </p:spPr>
-        <p:txBody>
-          <a:bodyPr wrap="square" lIns="0" rIns="0" tIns="0" bIns="0">
-            <a:spAutoFit/>
-          </a:bodyPr>
-          <a:lstStyle/>
-          <a:p>
-            <a:pPr algn="l">
-              <a:lnSpc>
-                <a:spcPct val="100000"/>
-              </a:lnSpc>
-              <a:spcAft>
-                <a:spcPts val="0"/>
-              </a:spcAft>
-            </a:pPr>
-            <a:r>
-              <a:rPr sz="1700" b="0">
-                <a:solidFill>
-                  <a:srgbClr val="1E293B"/>
-                </a:solidFill>
-                <a:latin typeface="Arial"/>
-              </a:rPr>
-              <a:t>Qwen3.8-27B</a:t>
-            </a:r>
-          </a:p>
-        </p:txBody>
-      </p:sp>
-      <p:sp>
-        <p:nvSpPr>
-          <p:cNvPr id="54" name="TextBox 53"/>
-          <p:cNvSpPr txBox="1"/>
-          <p:nvPr/>
-        </p:nvSpPr>
-        <p:spPr>
-          <a:xfrm>
-            <a:off x="36583315" y="14842743"/>
-            <a:ext cx="2227478" cy="365760"/>
-          </a:xfrm>
-          <a:prstGeom prst="rect">
-            <a:avLst/>
-          </a:prstGeom>
-          <a:noFill/>
-        </p:spPr>
-        <p:txBody>
-          <a:bodyPr wrap="square" lIns="0" rIns="0" tIns="0" bIns="0">
-            <a:spAutoFit/>
-          </a:bodyPr>
-          <a:lstStyle/>
-          <a:p>
-            <a:pPr algn="r">
-              <a:lnSpc>
-                <a:spcPct val="100000"/>
-              </a:lnSpc>
-              <a:spcAft>
-                <a:spcPts val="0"/>
-              </a:spcAft>
-            </a:pPr>
-            <a:r>
-              <a:rPr sz="1700" b="0">
-                <a:solidFill>
-                  <a:srgbClr val="1E293B"/>
-                </a:solidFill>
-                <a:latin typeface="Arial"/>
-              </a:rPr>
-              <a:t>0.702</a:t>
-            </a:r>
-          </a:p>
-        </p:txBody>
-      </p:sp>
-      <p:sp>
-        <p:nvSpPr>
-          <p:cNvPr id="55" name="TextBox 54"/>
-          <p:cNvSpPr txBox="1"/>
-          <p:nvPr/>
-        </p:nvSpPr>
-        <p:spPr>
-          <a:xfrm>
-            <a:off x="38810793" y="14842743"/>
-            <a:ext cx="2227478" cy="365760"/>
-          </a:xfrm>
-          <a:prstGeom prst="rect">
-            <a:avLst/>
-          </a:prstGeom>
-          <a:noFill/>
-        </p:spPr>
-        <p:txBody>
-          <a:bodyPr wrap="square" lIns="0" rIns="0" tIns="0" bIns="0">
-            <a:spAutoFit/>
-          </a:bodyPr>
-          <a:lstStyle/>
-          <a:p>
-            <a:pPr algn="r">
-              <a:lnSpc>
-                <a:spcPct val="100000"/>
-              </a:lnSpc>
-              <a:spcAft>
-                <a:spcPts val="0"/>
-              </a:spcAft>
-            </a:pPr>
-            <a:r>
-              <a:rPr sz="1700" b="0">
-                <a:solidFill>
-                  <a:srgbClr val="1E293B"/>
-                </a:solidFill>
-                <a:latin typeface="Arial"/>
-              </a:rPr>
-              <a:t>0.702</a:t>
-            </a:r>
-          </a:p>
-        </p:txBody>
-      </p:sp>
-      <p:sp>
-        <p:nvSpPr>
-          <p:cNvPr id="56" name="TextBox 55"/>
-          <p:cNvSpPr txBox="1"/>
-          <p:nvPr/>
-        </p:nvSpPr>
-        <p:spPr>
-          <a:xfrm>
-            <a:off x="41038272" y="14842743"/>
-            <a:ext cx="2121408" cy="365760"/>
-          </a:xfrm>
-          <a:prstGeom prst="rect">
-            <a:avLst/>
-          </a:prstGeom>
-          <a:noFill/>
-        </p:spPr>
-        <p:txBody>
-          <a:bodyPr wrap="square" lIns="0" rIns="0" tIns="0" bIns="0">
-            <a:spAutoFit/>
-          </a:bodyPr>
-          <a:lstStyle/>
-          <a:p>
-            <a:pPr algn="r">
-              <a:lnSpc>
-                <a:spcPct val="100000"/>
-              </a:lnSpc>
-              <a:spcAft>
-                <a:spcPts val="0"/>
-              </a:spcAft>
-            </a:pPr>
-            <a:r>
-              <a:rPr sz="1700" b="0">
-                <a:solidFill>
-                  <a:srgbClr val="1E293B"/>
-                </a:solidFill>
-                <a:latin typeface="Arial"/>
-              </a:rPr>
-              <a:t>57</a:t>
-            </a:r>
-          </a:p>
-        </p:txBody>
-      </p:sp>
-      <p:sp>
-        <p:nvSpPr>
-          <p:cNvPr id="57" name="Rectangle 56"/>
+              <a:t>incidents</a:t>
+            </a:r>
+          </a:p>
+        </p:txBody>
+      </p:sp>
+      <p:sp>
+        <p:nvSpPr>
+          <p:cNvPr id="37" name="Rectangle 36"/>
           <p:cNvSpPr/>
           <p:nvPr/>
         </p:nvSpPr>
         <p:spPr>
           <a:xfrm>
-            <a:off x="32552640" y="15272512"/>
-            <a:ext cx="10607040" cy="23774"/>
+            <a:off x="32552640" y="13112496"/>
+            <a:ext cx="10607040" cy="14630"/>
           </a:xfrm>
           <a:prstGeom prst="rect">
             <a:avLst/>
           </a:prstGeom>
           <a:solidFill>
-            <a:srgbClr val="1E293B"/>
+            <a:srgbClr val="C2CEDA"/>
           </a:solidFill>
           <a:ln>
             <a:noFill/>
@@ -5370,56 +4530,14 @@
       </p:sp>
       <p:sp>
         <p:nvSpPr>
-          <p:cNvPr id="58" name="TextBox 57"/>
+          <p:cNvPr id="38" name="TextBox 37"/>
           <p:cNvSpPr txBox="1"/>
           <p:nvPr/>
         </p:nvSpPr>
         <p:spPr>
           <a:xfrm>
-            <a:off x="32552640" y="15537687"/>
-            <a:ext cx="10607040" cy="365760"/>
-          </a:xfrm>
-          <a:prstGeom prst="rect">
-            <a:avLst/>
-          </a:prstGeom>
-          <a:noFill/>
-        </p:spPr>
-        <p:txBody>
-          <a:bodyPr wrap="square" lIns="0" rIns="0" tIns="0" bIns="0">
-            <a:spAutoFit/>
-          </a:bodyPr>
-          <a:lstStyle/>
-          <a:p>
-            <a:pPr algn="l">
-              <a:lnSpc>
-                <a:spcPct val="122000"/>
-              </a:lnSpc>
-              <a:spcAft>
-                <a:spcPts val="1200"/>
-              </a:spcAft>
-            </a:pPr>
-            <a:r>
-              <a:rPr sz="1600" b="0">
-                <a:solidFill>
-                  <a:srgbClr val="556575"/>
-                </a:solidFill>
-                <a:latin typeface="Arial"/>
-              </a:rPr>
-              <a:t>Recall does not order the reviewers by size. Evidence does. The 7 B has the highest recall on the table and two thirds of what it reports quotes a line that does not exist. That is the size class we had been running.</a:t>
-            </a:r>
-          </a:p>
-        </p:txBody>
-      </p:sp>
-      <p:sp>
-        <p:nvSpPr>
-          <p:cNvPr id="59" name="TextBox 58"/>
-          <p:cNvSpPr txBox="1"/>
-          <p:nvPr/>
-        </p:nvSpPr>
-        <p:spPr>
-          <a:xfrm>
-            <a:off x="32552640" y="16488663"/>
-            <a:ext cx="10607040" cy="365760"/>
+            <a:off x="32552640" y="13222224"/>
+            <a:ext cx="4030675" cy="365760"/>
           </a:xfrm>
           <a:prstGeom prst="rect">
             <a:avLst/>
@@ -5441,26 +4559,824 @@
               </a:spcAft>
             </a:pPr>
             <a:r>
-              <a:rPr sz="2400" b="1">
+              <a:rPr sz="1700" b="0">
                 <a:solidFill>
                   <a:srgbClr val="1E293B"/>
                 </a:solidFill>
                 <a:latin typeface="Arial"/>
               </a:rPr>
-              <a:t>Does more data help?</a:t>
-            </a:r>
-          </a:p>
-        </p:txBody>
-      </p:sp>
-      <p:sp>
-        <p:nvSpPr>
-          <p:cNvPr id="60" name="Rectangle 59"/>
+              <a:t>scripted watchdog</a:t>
+            </a:r>
+          </a:p>
+        </p:txBody>
+      </p:sp>
+      <p:sp>
+        <p:nvSpPr>
+          <p:cNvPr id="39" name="TextBox 38"/>
+          <p:cNvSpPr txBox="1"/>
+          <p:nvPr/>
+        </p:nvSpPr>
+        <p:spPr>
+          <a:xfrm>
+            <a:off x="36583315" y="13222224"/>
+            <a:ext cx="2227478" cy="365760"/>
+          </a:xfrm>
+          <a:prstGeom prst="rect">
+            <a:avLst/>
+          </a:prstGeom>
+          <a:noFill/>
+        </p:spPr>
+        <p:txBody>
+          <a:bodyPr wrap="square" lIns="0" rIns="0" tIns="0" bIns="0">
+            <a:spAutoFit/>
+          </a:bodyPr>
+          <a:lstStyle/>
+          <a:p>
+            <a:pPr algn="r">
+              <a:lnSpc>
+                <a:spcPct val="100000"/>
+              </a:lnSpc>
+              <a:spcAft>
+                <a:spcPts val="0"/>
+              </a:spcAft>
+            </a:pPr>
+            <a:r>
+              <a:rPr sz="1700" b="0">
+                <a:solidFill>
+                  <a:srgbClr val="1E293B"/>
+                </a:solidFill>
+                <a:latin typeface="Arial"/>
+              </a:rPr>
+              <a:t>no decision</a:t>
+            </a:r>
+          </a:p>
+        </p:txBody>
+      </p:sp>
+      <p:sp>
+        <p:nvSpPr>
+          <p:cNvPr id="40" name="TextBox 39"/>
+          <p:cNvSpPr txBox="1"/>
+          <p:nvPr/>
+        </p:nvSpPr>
+        <p:spPr>
+          <a:xfrm>
+            <a:off x="38810793" y="13222224"/>
+            <a:ext cx="2227478" cy="365760"/>
+          </a:xfrm>
+          <a:prstGeom prst="rect">
+            <a:avLst/>
+          </a:prstGeom>
+          <a:noFill/>
+        </p:spPr>
+        <p:txBody>
+          <a:bodyPr wrap="square" lIns="0" rIns="0" tIns="0" bIns="0">
+            <a:spAutoFit/>
+          </a:bodyPr>
+          <a:lstStyle/>
+          <a:p>
+            <a:pPr algn="r">
+              <a:lnSpc>
+                <a:spcPct val="100000"/>
+              </a:lnSpc>
+              <a:spcAft>
+                <a:spcPts val="0"/>
+              </a:spcAft>
+            </a:pPr>
+            <a:r>
+              <a:rPr sz="1700" b="0">
+                <a:solidFill>
+                  <a:srgbClr val="1E293B"/>
+                </a:solidFill>
+                <a:latin typeface="Arial"/>
+              </a:rPr>
+              <a:t>—</a:t>
+            </a:r>
+          </a:p>
+        </p:txBody>
+      </p:sp>
+      <p:sp>
+        <p:nvSpPr>
+          <p:cNvPr id="41" name="TextBox 40"/>
+          <p:cNvSpPr txBox="1"/>
+          <p:nvPr/>
+        </p:nvSpPr>
+        <p:spPr>
+          <a:xfrm>
+            <a:off x="41038272" y="13222224"/>
+            <a:ext cx="2121408" cy="365760"/>
+          </a:xfrm>
+          <a:prstGeom prst="rect">
+            <a:avLst/>
+          </a:prstGeom>
+          <a:noFill/>
+        </p:spPr>
+        <p:txBody>
+          <a:bodyPr wrap="square" lIns="0" rIns="0" tIns="0" bIns="0">
+            <a:spAutoFit/>
+          </a:bodyPr>
+          <a:lstStyle/>
+          <a:p>
+            <a:pPr algn="r">
+              <a:lnSpc>
+                <a:spcPct val="100000"/>
+              </a:lnSpc>
+              <a:spcAft>
+                <a:spcPts val="0"/>
+              </a:spcAft>
+            </a:pPr>
+            <a:r>
+              <a:rPr sz="1700" b="0">
+                <a:solidFill>
+                  <a:srgbClr val="1E293B"/>
+                </a:solidFill>
+                <a:latin typeface="Arial"/>
+              </a:rPr>
+              <a:t>—</a:t>
+            </a:r>
+          </a:p>
+        </p:txBody>
+      </p:sp>
+      <p:sp>
+        <p:nvSpPr>
+          <p:cNvPr id="42" name="TextBox 41"/>
+          <p:cNvSpPr txBox="1"/>
+          <p:nvPr/>
+        </p:nvSpPr>
+        <p:spPr>
+          <a:xfrm>
+            <a:off x="32552640" y="13624559"/>
+            <a:ext cx="4030675" cy="365760"/>
+          </a:xfrm>
+          <a:prstGeom prst="rect">
+            <a:avLst/>
+          </a:prstGeom>
+          <a:noFill/>
+        </p:spPr>
+        <p:txBody>
+          <a:bodyPr wrap="square" lIns="0" rIns="0" tIns="0" bIns="0">
+            <a:spAutoFit/>
+          </a:bodyPr>
+          <a:lstStyle/>
+          <a:p>
+            <a:pPr algn="l">
+              <a:lnSpc>
+                <a:spcPct val="100000"/>
+              </a:lnSpc>
+              <a:spcAft>
+                <a:spcPts val="0"/>
+              </a:spcAft>
+            </a:pPr>
+            <a:r>
+              <a:rPr sz="1700" b="0">
+                <a:solidFill>
+                  <a:srgbClr val="1E293B"/>
+                </a:solidFill>
+                <a:latin typeface="Arial"/>
+              </a:rPr>
+              <a:t>12 rules</a:t>
+            </a:r>
+          </a:p>
+        </p:txBody>
+      </p:sp>
+      <p:sp>
+        <p:nvSpPr>
+          <p:cNvPr id="43" name="TextBox 42"/>
+          <p:cNvSpPr txBox="1"/>
+          <p:nvPr/>
+        </p:nvSpPr>
+        <p:spPr>
+          <a:xfrm>
+            <a:off x="36583315" y="13624559"/>
+            <a:ext cx="2227478" cy="365760"/>
+          </a:xfrm>
+          <a:prstGeom prst="rect">
+            <a:avLst/>
+          </a:prstGeom>
+          <a:noFill/>
+        </p:spPr>
+        <p:txBody>
+          <a:bodyPr wrap="square" lIns="0" rIns="0" tIns="0" bIns="0">
+            <a:spAutoFit/>
+          </a:bodyPr>
+          <a:lstStyle/>
+          <a:p>
+            <a:pPr algn="r">
+              <a:lnSpc>
+                <a:spcPct val="100000"/>
+              </a:lnSpc>
+              <a:spcAft>
+                <a:spcPts val="0"/>
+              </a:spcAft>
+            </a:pPr>
+            <a:r>
+              <a:rPr sz="1700" b="0">
+                <a:solidFill>
+                  <a:srgbClr val="1E293B"/>
+                </a:solidFill>
+                <a:latin typeface="Arial"/>
+              </a:rPr>
+              <a:t>0.095</a:t>
+            </a:r>
+          </a:p>
+        </p:txBody>
+      </p:sp>
+      <p:sp>
+        <p:nvSpPr>
+          <p:cNvPr id="44" name="TextBox 43"/>
+          <p:cNvSpPr txBox="1"/>
+          <p:nvPr/>
+        </p:nvSpPr>
+        <p:spPr>
+          <a:xfrm>
+            <a:off x="38810793" y="13624559"/>
+            <a:ext cx="2227478" cy="365760"/>
+          </a:xfrm>
+          <a:prstGeom prst="rect">
+            <a:avLst/>
+          </a:prstGeom>
+          <a:noFill/>
+        </p:spPr>
+        <p:txBody>
+          <a:bodyPr wrap="square" lIns="0" rIns="0" tIns="0" bIns="0">
+            <a:spAutoFit/>
+          </a:bodyPr>
+          <a:lstStyle/>
+          <a:p>
+            <a:pPr algn="r">
+              <a:lnSpc>
+                <a:spcPct val="100000"/>
+              </a:lnSpc>
+              <a:spcAft>
+                <a:spcPts val="0"/>
+              </a:spcAft>
+            </a:pPr>
+            <a:r>
+              <a:rPr sz="1700" b="0">
+                <a:solidFill>
+                  <a:srgbClr val="1E293B"/>
+                </a:solidFill>
+                <a:latin typeface="Arial"/>
+              </a:rPr>
+              <a:t>0.095</a:t>
+            </a:r>
+          </a:p>
+        </p:txBody>
+      </p:sp>
+      <p:sp>
+        <p:nvSpPr>
+          <p:cNvPr id="45" name="TextBox 44"/>
+          <p:cNvSpPr txBox="1"/>
+          <p:nvPr/>
+        </p:nvSpPr>
+        <p:spPr>
+          <a:xfrm>
+            <a:off x="41038272" y="13624559"/>
+            <a:ext cx="2121408" cy="365760"/>
+          </a:xfrm>
+          <a:prstGeom prst="rect">
+            <a:avLst/>
+          </a:prstGeom>
+          <a:noFill/>
+        </p:spPr>
+        <p:txBody>
+          <a:bodyPr wrap="square" lIns="0" rIns="0" tIns="0" bIns="0">
+            <a:spAutoFit/>
+          </a:bodyPr>
+          <a:lstStyle/>
+          <a:p>
+            <a:pPr algn="r">
+              <a:lnSpc>
+                <a:spcPct val="100000"/>
+              </a:lnSpc>
+              <a:spcAft>
+                <a:spcPts val="0"/>
+              </a:spcAft>
+            </a:pPr>
+            <a:r>
+              <a:rPr sz="1700" b="0">
+                <a:solidFill>
+                  <a:srgbClr val="1E293B"/>
+                </a:solidFill>
+                <a:latin typeface="Arial"/>
+              </a:rPr>
+              <a:t>116</a:t>
+            </a:r>
+          </a:p>
+        </p:txBody>
+      </p:sp>
+      <p:sp>
+        <p:nvSpPr>
+          <p:cNvPr id="46" name="TextBox 45"/>
+          <p:cNvSpPr txBox="1"/>
+          <p:nvPr/>
+        </p:nvSpPr>
+        <p:spPr>
+          <a:xfrm>
+            <a:off x="32552640" y="14026895"/>
+            <a:ext cx="4030675" cy="365760"/>
+          </a:xfrm>
+          <a:prstGeom prst="rect">
+            <a:avLst/>
+          </a:prstGeom>
+          <a:noFill/>
+        </p:spPr>
+        <p:txBody>
+          <a:bodyPr wrap="square" lIns="0" rIns="0" tIns="0" bIns="0">
+            <a:spAutoFit/>
+          </a:bodyPr>
+          <a:lstStyle/>
+          <a:p>
+            <a:pPr algn="l">
+              <a:lnSpc>
+                <a:spcPct val="100000"/>
+              </a:lnSpc>
+              <a:spcAft>
+                <a:spcPts val="0"/>
+              </a:spcAft>
+            </a:pPr>
+            <a:r>
+              <a:rPr sz="1700" b="0">
+                <a:solidFill>
+                  <a:srgbClr val="1E293B"/>
+                </a:solidFill>
+                <a:latin typeface="Arial"/>
+              </a:rPr>
+              <a:t>Qwen2.5-7B</a:t>
+            </a:r>
+          </a:p>
+        </p:txBody>
+      </p:sp>
+      <p:sp>
+        <p:nvSpPr>
+          <p:cNvPr id="47" name="TextBox 46"/>
+          <p:cNvSpPr txBox="1"/>
+          <p:nvPr/>
+        </p:nvSpPr>
+        <p:spPr>
+          <a:xfrm>
+            <a:off x="36583315" y="14026895"/>
+            <a:ext cx="2227478" cy="365760"/>
+          </a:xfrm>
+          <a:prstGeom prst="rect">
+            <a:avLst/>
+          </a:prstGeom>
+          <a:noFill/>
+        </p:spPr>
+        <p:txBody>
+          <a:bodyPr wrap="square" lIns="0" rIns="0" tIns="0" bIns="0">
+            <a:spAutoFit/>
+          </a:bodyPr>
+          <a:lstStyle/>
+          <a:p>
+            <a:pPr algn="r">
+              <a:lnSpc>
+                <a:spcPct val="100000"/>
+              </a:lnSpc>
+              <a:spcAft>
+                <a:spcPts val="0"/>
+              </a:spcAft>
+            </a:pPr>
+            <a:r>
+              <a:rPr sz="1700" b="0">
+                <a:solidFill>
+                  <a:srgbClr val="1E293B"/>
+                </a:solidFill>
+                <a:latin typeface="Arial"/>
+              </a:rPr>
+              <a:t>0.823</a:t>
+            </a:r>
+          </a:p>
+        </p:txBody>
+      </p:sp>
+      <p:sp>
+        <p:nvSpPr>
+          <p:cNvPr id="48" name="TextBox 47"/>
+          <p:cNvSpPr txBox="1"/>
+          <p:nvPr/>
+        </p:nvSpPr>
+        <p:spPr>
+          <a:xfrm>
+            <a:off x="38810793" y="14026895"/>
+            <a:ext cx="2227478" cy="365760"/>
+          </a:xfrm>
+          <a:prstGeom prst="rect">
+            <a:avLst/>
+          </a:prstGeom>
+          <a:noFill/>
+        </p:spPr>
+        <p:txBody>
+          <a:bodyPr wrap="square" lIns="0" rIns="0" tIns="0" bIns="0">
+            <a:spAutoFit/>
+          </a:bodyPr>
+          <a:lstStyle/>
+          <a:p>
+            <a:pPr algn="r">
+              <a:lnSpc>
+                <a:spcPct val="100000"/>
+              </a:lnSpc>
+              <a:spcAft>
+                <a:spcPts val="0"/>
+              </a:spcAft>
+            </a:pPr>
+            <a:r>
+              <a:rPr sz="1700" b="0">
+                <a:solidFill>
+                  <a:srgbClr val="1E293B"/>
+                </a:solidFill>
+                <a:latin typeface="Arial"/>
+              </a:rPr>
+              <a:t>0.274</a:t>
+            </a:r>
+          </a:p>
+        </p:txBody>
+      </p:sp>
+      <p:sp>
+        <p:nvSpPr>
+          <p:cNvPr id="49" name="TextBox 48"/>
+          <p:cNvSpPr txBox="1"/>
+          <p:nvPr/>
+        </p:nvSpPr>
+        <p:spPr>
+          <a:xfrm>
+            <a:off x="41038272" y="14026895"/>
+            <a:ext cx="2121408" cy="365760"/>
+          </a:xfrm>
+          <a:prstGeom prst="rect">
+            <a:avLst/>
+          </a:prstGeom>
+          <a:noFill/>
+        </p:spPr>
+        <p:txBody>
+          <a:bodyPr wrap="square" lIns="0" rIns="0" tIns="0" bIns="0">
+            <a:spAutoFit/>
+          </a:bodyPr>
+          <a:lstStyle/>
+          <a:p>
+            <a:pPr algn="r">
+              <a:lnSpc>
+                <a:spcPct val="100000"/>
+              </a:lnSpc>
+              <a:spcAft>
+                <a:spcPts val="0"/>
+              </a:spcAft>
+            </a:pPr>
+            <a:r>
+              <a:rPr sz="1700" b="0">
+                <a:solidFill>
+                  <a:srgbClr val="1E293B"/>
+                </a:solidFill>
+                <a:latin typeface="Arial"/>
+              </a:rPr>
+              <a:t>113</a:t>
+            </a:r>
+          </a:p>
+        </p:txBody>
+      </p:sp>
+      <p:sp>
+        <p:nvSpPr>
+          <p:cNvPr id="50" name="TextBox 49"/>
+          <p:cNvSpPr txBox="1"/>
+          <p:nvPr/>
+        </p:nvSpPr>
+        <p:spPr>
+          <a:xfrm>
+            <a:off x="32552640" y="14429231"/>
+            <a:ext cx="4030675" cy="365760"/>
+          </a:xfrm>
+          <a:prstGeom prst="rect">
+            <a:avLst/>
+          </a:prstGeom>
+          <a:noFill/>
+        </p:spPr>
+        <p:txBody>
+          <a:bodyPr wrap="square" lIns="0" rIns="0" tIns="0" bIns="0">
+            <a:spAutoFit/>
+          </a:bodyPr>
+          <a:lstStyle/>
+          <a:p>
+            <a:pPr algn="l">
+              <a:lnSpc>
+                <a:spcPct val="100000"/>
+              </a:lnSpc>
+              <a:spcAft>
+                <a:spcPts val="0"/>
+              </a:spcAft>
+            </a:pPr>
+            <a:r>
+              <a:rPr sz="1700" b="0">
+                <a:solidFill>
+                  <a:srgbClr val="1E293B"/>
+                </a:solidFill>
+                <a:latin typeface="Arial"/>
+              </a:rPr>
+              <a:t>Qwen3-14B</a:t>
+            </a:r>
+          </a:p>
+        </p:txBody>
+      </p:sp>
+      <p:sp>
+        <p:nvSpPr>
+          <p:cNvPr id="51" name="TextBox 50"/>
+          <p:cNvSpPr txBox="1"/>
+          <p:nvPr/>
+        </p:nvSpPr>
+        <p:spPr>
+          <a:xfrm>
+            <a:off x="36583315" y="14429231"/>
+            <a:ext cx="2227478" cy="365760"/>
+          </a:xfrm>
+          <a:prstGeom prst="rect">
+            <a:avLst/>
+          </a:prstGeom>
+          <a:noFill/>
+        </p:spPr>
+        <p:txBody>
+          <a:bodyPr wrap="square" lIns="0" rIns="0" tIns="0" bIns="0">
+            <a:spAutoFit/>
+          </a:bodyPr>
+          <a:lstStyle/>
+          <a:p>
+            <a:pPr algn="r">
+              <a:lnSpc>
+                <a:spcPct val="100000"/>
+              </a:lnSpc>
+              <a:spcAft>
+                <a:spcPts val="0"/>
+              </a:spcAft>
+            </a:pPr>
+            <a:r>
+              <a:rPr sz="1700" b="0">
+                <a:solidFill>
+                  <a:srgbClr val="1E293B"/>
+                </a:solidFill>
+                <a:latin typeface="Arial"/>
+              </a:rPr>
+              <a:t>0.675</a:t>
+            </a:r>
+          </a:p>
+        </p:txBody>
+      </p:sp>
+      <p:sp>
+        <p:nvSpPr>
+          <p:cNvPr id="52" name="TextBox 51"/>
+          <p:cNvSpPr txBox="1"/>
+          <p:nvPr/>
+        </p:nvSpPr>
+        <p:spPr>
+          <a:xfrm>
+            <a:off x="38810793" y="14429231"/>
+            <a:ext cx="2227478" cy="365760"/>
+          </a:xfrm>
+          <a:prstGeom prst="rect">
+            <a:avLst/>
+          </a:prstGeom>
+          <a:noFill/>
+        </p:spPr>
+        <p:txBody>
+          <a:bodyPr wrap="square" lIns="0" rIns="0" tIns="0" bIns="0">
+            <a:spAutoFit/>
+          </a:bodyPr>
+          <a:lstStyle/>
+          <a:p>
+            <a:pPr algn="r">
+              <a:lnSpc>
+                <a:spcPct val="100000"/>
+              </a:lnSpc>
+              <a:spcAft>
+                <a:spcPts val="0"/>
+              </a:spcAft>
+            </a:pPr>
+            <a:r>
+              <a:rPr sz="1700" b="0">
+                <a:solidFill>
+                  <a:srgbClr val="1E293B"/>
+                </a:solidFill>
+                <a:latin typeface="Arial"/>
+              </a:rPr>
+              <a:t>0.614</a:t>
+            </a:r>
+          </a:p>
+        </p:txBody>
+      </p:sp>
+      <p:sp>
+        <p:nvSpPr>
+          <p:cNvPr id="53" name="TextBox 52"/>
+          <p:cNvSpPr txBox="1"/>
+          <p:nvPr/>
+        </p:nvSpPr>
+        <p:spPr>
+          <a:xfrm>
+            <a:off x="41038272" y="14429231"/>
+            <a:ext cx="2121408" cy="365760"/>
+          </a:xfrm>
+          <a:prstGeom prst="rect">
+            <a:avLst/>
+          </a:prstGeom>
+          <a:noFill/>
+        </p:spPr>
+        <p:txBody>
+          <a:bodyPr wrap="square" lIns="0" rIns="0" tIns="0" bIns="0">
+            <a:spAutoFit/>
+          </a:bodyPr>
+          <a:lstStyle/>
+          <a:p>
+            <a:pPr algn="r">
+              <a:lnSpc>
+                <a:spcPct val="100000"/>
+              </a:lnSpc>
+              <a:spcAft>
+                <a:spcPts val="0"/>
+              </a:spcAft>
+            </a:pPr>
+            <a:r>
+              <a:rPr sz="1700" b="0">
+                <a:solidFill>
+                  <a:srgbClr val="1E293B"/>
+                </a:solidFill>
+                <a:latin typeface="Arial"/>
+              </a:rPr>
+              <a:t>114</a:t>
+            </a:r>
+          </a:p>
+        </p:txBody>
+      </p:sp>
+      <p:sp>
+        <p:nvSpPr>
+          <p:cNvPr id="54" name="TextBox 53"/>
+          <p:cNvSpPr txBox="1"/>
+          <p:nvPr/>
+        </p:nvSpPr>
+        <p:spPr>
+          <a:xfrm>
+            <a:off x="32552640" y="14831567"/>
+            <a:ext cx="4030675" cy="365760"/>
+          </a:xfrm>
+          <a:prstGeom prst="rect">
+            <a:avLst/>
+          </a:prstGeom>
+          <a:noFill/>
+        </p:spPr>
+        <p:txBody>
+          <a:bodyPr wrap="square" lIns="0" rIns="0" tIns="0" bIns="0">
+            <a:spAutoFit/>
+          </a:bodyPr>
+          <a:lstStyle/>
+          <a:p>
+            <a:pPr algn="l">
+              <a:lnSpc>
+                <a:spcPct val="100000"/>
+              </a:lnSpc>
+              <a:spcAft>
+                <a:spcPts val="0"/>
+              </a:spcAft>
+            </a:pPr>
+            <a:r>
+              <a:rPr sz="1700" b="0">
+                <a:solidFill>
+                  <a:srgbClr val="1E293B"/>
+                </a:solidFill>
+                <a:latin typeface="Arial"/>
+              </a:rPr>
+              <a:t>Qwen3.8-27B</a:t>
+            </a:r>
+          </a:p>
+        </p:txBody>
+      </p:sp>
+      <p:sp>
+        <p:nvSpPr>
+          <p:cNvPr id="55" name="TextBox 54"/>
+          <p:cNvSpPr txBox="1"/>
+          <p:nvPr/>
+        </p:nvSpPr>
+        <p:spPr>
+          <a:xfrm>
+            <a:off x="36583315" y="14831567"/>
+            <a:ext cx="2227478" cy="365760"/>
+          </a:xfrm>
+          <a:prstGeom prst="rect">
+            <a:avLst/>
+          </a:prstGeom>
+          <a:noFill/>
+        </p:spPr>
+        <p:txBody>
+          <a:bodyPr wrap="square" lIns="0" rIns="0" tIns="0" bIns="0">
+            <a:spAutoFit/>
+          </a:bodyPr>
+          <a:lstStyle/>
+          <a:p>
+            <a:pPr algn="r">
+              <a:lnSpc>
+                <a:spcPct val="100000"/>
+              </a:lnSpc>
+              <a:spcAft>
+                <a:spcPts val="0"/>
+              </a:spcAft>
+            </a:pPr>
+            <a:r>
+              <a:rPr sz="1700" b="0">
+                <a:solidFill>
+                  <a:srgbClr val="1E293B"/>
+                </a:solidFill>
+                <a:latin typeface="Arial"/>
+              </a:rPr>
+              <a:t>0.702</a:t>
+            </a:r>
+          </a:p>
+        </p:txBody>
+      </p:sp>
+      <p:sp>
+        <p:nvSpPr>
+          <p:cNvPr id="56" name="TextBox 55"/>
+          <p:cNvSpPr txBox="1"/>
+          <p:nvPr/>
+        </p:nvSpPr>
+        <p:spPr>
+          <a:xfrm>
+            <a:off x="38810793" y="14831567"/>
+            <a:ext cx="2227478" cy="365760"/>
+          </a:xfrm>
+          <a:prstGeom prst="rect">
+            <a:avLst/>
+          </a:prstGeom>
+          <a:noFill/>
+        </p:spPr>
+        <p:txBody>
+          <a:bodyPr wrap="square" lIns="0" rIns="0" tIns="0" bIns="0">
+            <a:spAutoFit/>
+          </a:bodyPr>
+          <a:lstStyle/>
+          <a:p>
+            <a:pPr algn="r">
+              <a:lnSpc>
+                <a:spcPct val="100000"/>
+              </a:lnSpc>
+              <a:spcAft>
+                <a:spcPts val="0"/>
+              </a:spcAft>
+            </a:pPr>
+            <a:r>
+              <a:rPr sz="1700" b="0">
+                <a:solidFill>
+                  <a:srgbClr val="1E293B"/>
+                </a:solidFill>
+                <a:latin typeface="Arial"/>
+              </a:rPr>
+              <a:t>0.702</a:t>
+            </a:r>
+          </a:p>
+        </p:txBody>
+      </p:sp>
+      <p:sp>
+        <p:nvSpPr>
+          <p:cNvPr id="57" name="TextBox 56"/>
+          <p:cNvSpPr txBox="1"/>
+          <p:nvPr/>
+        </p:nvSpPr>
+        <p:spPr>
+          <a:xfrm>
+            <a:off x="41038272" y="14831567"/>
+            <a:ext cx="2121408" cy="365760"/>
+          </a:xfrm>
+          <a:prstGeom prst="rect">
+            <a:avLst/>
+          </a:prstGeom>
+          <a:noFill/>
+        </p:spPr>
+        <p:txBody>
+          <a:bodyPr wrap="square" lIns="0" rIns="0" tIns="0" bIns="0">
+            <a:spAutoFit/>
+          </a:bodyPr>
+          <a:lstStyle/>
+          <a:p>
+            <a:pPr algn="r">
+              <a:lnSpc>
+                <a:spcPct val="100000"/>
+              </a:lnSpc>
+              <a:spcAft>
+                <a:spcPts val="0"/>
+              </a:spcAft>
+            </a:pPr>
+            <a:r>
+              <a:rPr sz="1700" b="0">
+                <a:solidFill>
+                  <a:srgbClr val="1E293B"/>
+                </a:solidFill>
+                <a:latin typeface="Arial"/>
+              </a:rPr>
+              <a:t>57</a:t>
+            </a:r>
+          </a:p>
+        </p:txBody>
+      </p:sp>
+      <p:sp>
+        <p:nvSpPr>
+          <p:cNvPr id="58" name="Rectangle 57"/>
           <p:cNvSpPr/>
           <p:nvPr/>
         </p:nvSpPr>
         <p:spPr>
           <a:xfrm>
-            <a:off x="32552640" y="16909288"/>
+            <a:off x="32552640" y="15261336"/>
             <a:ext cx="10607040" cy="23774"/>
           </a:xfrm>
           <a:prstGeom prst="rect">
@@ -5498,14 +5414,56 @@
       </p:sp>
       <p:sp>
         <p:nvSpPr>
-          <p:cNvPr id="61" name="TextBox 60"/>
+          <p:cNvPr id="59" name="TextBox 58"/>
           <p:cNvSpPr txBox="1"/>
           <p:nvPr/>
         </p:nvSpPr>
         <p:spPr>
           <a:xfrm>
-            <a:off x="32552640" y="17028159"/>
-            <a:ext cx="4667097" cy="365760"/>
+            <a:off x="32552640" y="15526512"/>
+            <a:ext cx="10607040" cy="365760"/>
+          </a:xfrm>
+          <a:prstGeom prst="rect">
+            <a:avLst/>
+          </a:prstGeom>
+          <a:noFill/>
+        </p:spPr>
+        <p:txBody>
+          <a:bodyPr wrap="square" lIns="0" rIns="0" tIns="0" bIns="0">
+            <a:spAutoFit/>
+          </a:bodyPr>
+          <a:lstStyle/>
+          <a:p>
+            <a:pPr algn="l">
+              <a:lnSpc>
+                <a:spcPct val="122000"/>
+              </a:lnSpc>
+              <a:spcAft>
+                <a:spcPts val="1200"/>
+              </a:spcAft>
+            </a:pPr>
+            <a:r>
+              <a:rPr sz="1600" b="0">
+                <a:solidFill>
+                  <a:srgbClr val="556575"/>
+                </a:solidFill>
+                <a:latin typeface="Arial"/>
+              </a:rPr>
+              <a:t>Recall does not order the reviewers by size. Evidence does. The 7 B has the highest recall on the table and two thirds of what it reports quotes a line that does not exist. That is the size class we had been running.</a:t>
+            </a:r>
+          </a:p>
+        </p:txBody>
+      </p:sp>
+      <p:sp>
+        <p:nvSpPr>
+          <p:cNvPr id="60" name="TextBox 59"/>
+          <p:cNvSpPr txBox="1"/>
+          <p:nvPr/>
+        </p:nvSpPr>
+        <p:spPr>
+          <a:xfrm>
+            <a:off x="32552640" y="16477488"/>
+            <a:ext cx="10607040" cy="365760"/>
           </a:xfrm>
           <a:prstGeom prst="rect">
             <a:avLst/>
@@ -5527,117 +5485,33 @@
               </a:spcAft>
             </a:pPr>
             <a:r>
-              <a:rPr sz="1550" b="1">
+              <a:rPr sz="2400" b="1">
                 <a:solidFill>
                   <a:srgbClr val="1E293B"/>
                 </a:solidFill>
                 <a:latin typeface="Arial"/>
               </a:rPr>
-              <a:t>harvested added</a:t>
-            </a:r>
-          </a:p>
-        </p:txBody>
-      </p:sp>
-      <p:sp>
-        <p:nvSpPr>
-          <p:cNvPr id="62" name="TextBox 61"/>
-          <p:cNvSpPr txBox="1"/>
-          <p:nvPr/>
-        </p:nvSpPr>
-        <p:spPr>
-          <a:xfrm>
-            <a:off x="37219737" y="17028159"/>
-            <a:ext cx="4242816" cy="365760"/>
-          </a:xfrm>
-          <a:prstGeom prst="rect">
-            <a:avLst/>
-          </a:prstGeom>
-          <a:noFill/>
-        </p:spPr>
-        <p:txBody>
-          <a:bodyPr wrap="square" lIns="0" rIns="0" tIns="0" bIns="0">
-            <a:spAutoFit/>
-          </a:bodyPr>
-          <a:lstStyle/>
-          <a:p>
-            <a:pPr algn="r">
-              <a:lnSpc>
-                <a:spcPct val="100000"/>
-              </a:lnSpc>
-              <a:spcAft>
-                <a:spcPts val="0"/>
-              </a:spcAft>
-            </a:pPr>
-            <a:r>
-              <a:rPr sz="1550" b="1">
-                <a:solidFill>
-                  <a:srgbClr val="1E293B"/>
-                </a:solidFill>
-                <a:latin typeface="Arial"/>
-              </a:rPr>
-              <a:t>mAP50-95</a:t>
-            </a:r>
-          </a:p>
-        </p:txBody>
-      </p:sp>
-      <p:sp>
-        <p:nvSpPr>
-          <p:cNvPr id="63" name="TextBox 62"/>
-          <p:cNvSpPr txBox="1"/>
-          <p:nvPr/>
-        </p:nvSpPr>
-        <p:spPr>
-          <a:xfrm>
-            <a:off x="41462553" y="17028159"/>
-            <a:ext cx="1697126" cy="365760"/>
-          </a:xfrm>
-          <a:prstGeom prst="rect">
-            <a:avLst/>
-          </a:prstGeom>
-          <a:noFill/>
-        </p:spPr>
-        <p:txBody>
-          <a:bodyPr wrap="square" lIns="0" rIns="0" tIns="0" bIns="0">
-            <a:spAutoFit/>
-          </a:bodyPr>
-          <a:lstStyle/>
-          <a:p>
-            <a:pPr algn="r">
-              <a:lnSpc>
-                <a:spcPct val="100000"/>
-              </a:lnSpc>
-              <a:spcAft>
-                <a:spcPts val="0"/>
-              </a:spcAft>
-            </a:pPr>
-            <a:r>
-              <a:rPr sz="1550" b="1">
-                <a:solidFill>
-                  <a:srgbClr val="1E293B"/>
-                </a:solidFill>
-                <a:latin typeface="Arial"/>
-              </a:rPr>
-              <a:t>n</a:t>
-            </a:r>
-          </a:p>
-        </p:txBody>
-      </p:sp>
-      <p:sp>
-        <p:nvSpPr>
-          <p:cNvPr id="64" name="Rectangle 63"/>
+              <a:t>Does more data help?</a:t>
+            </a:r>
+          </a:p>
+        </p:txBody>
+      </p:sp>
+      <p:sp>
+        <p:nvSpPr>
+          <p:cNvPr id="61" name="Rectangle 60"/>
           <p:cNvSpPr/>
           <p:nvPr/>
         </p:nvSpPr>
         <p:spPr>
           <a:xfrm>
-            <a:off x="32552640" y="17393919"/>
-            <a:ext cx="10607040" cy="14630"/>
+            <a:off x="32552640" y="16898112"/>
+            <a:ext cx="10607040" cy="23774"/>
           </a:xfrm>
           <a:prstGeom prst="rect">
             <a:avLst/>
           </a:prstGeom>
           <a:solidFill>
-            <a:srgbClr val="C2CEDA"/>
+            <a:srgbClr val="1E293B"/>
           </a:solidFill>
           <a:ln>
             <a:noFill/>
@@ -5668,13 +5542,13 @@
       </p:sp>
       <p:sp>
         <p:nvSpPr>
-          <p:cNvPr id="65" name="TextBox 64"/>
+          <p:cNvPr id="62" name="TextBox 61"/>
           <p:cNvSpPr txBox="1"/>
           <p:nvPr/>
         </p:nvSpPr>
         <p:spPr>
           <a:xfrm>
-            <a:off x="32552640" y="17503647"/>
+            <a:off x="32552640" y="17016984"/>
             <a:ext cx="4667097" cy="365760"/>
           </a:xfrm>
           <a:prstGeom prst="rect">
@@ -5697,26 +5571,26 @@
               </a:spcAft>
             </a:pPr>
             <a:r>
-              <a:rPr sz="1700" b="0">
+              <a:rPr sz="1550" b="1">
                 <a:solidFill>
                   <a:srgbClr val="1E293B"/>
                 </a:solidFill>
                 <a:latin typeface="Arial"/>
               </a:rPr>
-              <a:t>none, the core</a:t>
-            </a:r>
-          </a:p>
-        </p:txBody>
-      </p:sp>
-      <p:sp>
-        <p:nvSpPr>
-          <p:cNvPr id="66" name="TextBox 65"/>
+              <a:t>harvested added</a:t>
+            </a:r>
+          </a:p>
+        </p:txBody>
+      </p:sp>
+      <p:sp>
+        <p:nvSpPr>
+          <p:cNvPr id="63" name="TextBox 62"/>
           <p:cNvSpPr txBox="1"/>
           <p:nvPr/>
         </p:nvSpPr>
         <p:spPr>
           <a:xfrm>
-            <a:off x="37219737" y="17503647"/>
+            <a:off x="37219737" y="17016984"/>
             <a:ext cx="4242816" cy="365760"/>
           </a:xfrm>
           <a:prstGeom prst="rect">
@@ -5739,26 +5613,26 @@
               </a:spcAft>
             </a:pPr>
             <a:r>
-              <a:rPr sz="1700" b="0">
+              <a:rPr sz="1550" b="1">
                 <a:solidFill>
                   <a:srgbClr val="1E293B"/>
                 </a:solidFill>
                 <a:latin typeface="Arial"/>
               </a:rPr>
-              <a:t>0.8637 ± 0.0027</a:t>
-            </a:r>
-          </a:p>
-        </p:txBody>
-      </p:sp>
-      <p:sp>
-        <p:nvSpPr>
-          <p:cNvPr id="67" name="TextBox 66"/>
+              <a:t>mAP50-95</a:t>
+            </a:r>
+          </a:p>
+        </p:txBody>
+      </p:sp>
+      <p:sp>
+        <p:nvSpPr>
+          <p:cNvPr id="64" name="TextBox 63"/>
           <p:cNvSpPr txBox="1"/>
           <p:nvPr/>
         </p:nvSpPr>
         <p:spPr>
           <a:xfrm>
-            <a:off x="41462553" y="17503647"/>
+            <a:off x="41462553" y="17016984"/>
             <a:ext cx="1697126" cy="365760"/>
           </a:xfrm>
           <a:prstGeom prst="rect">
@@ -5781,411 +5655,33 @@
               </a:spcAft>
             </a:pPr>
             <a:r>
-              <a:rPr sz="1700" b="0">
+              <a:rPr sz="1550" b="1">
                 <a:solidFill>
                   <a:srgbClr val="1E293B"/>
                 </a:solidFill>
                 <a:latin typeface="Arial"/>
               </a:rPr>
-              <a:t>3</a:t>
-            </a:r>
-          </a:p>
-        </p:txBody>
-      </p:sp>
-      <p:sp>
-        <p:nvSpPr>
-          <p:cNvPr id="68" name="TextBox 67"/>
-          <p:cNvSpPr txBox="1"/>
-          <p:nvPr/>
-        </p:nvSpPr>
-        <p:spPr>
-          <a:xfrm>
-            <a:off x="32552640" y="17905984"/>
-            <a:ext cx="4667097" cy="365760"/>
-          </a:xfrm>
-          <a:prstGeom prst="rect">
-            <a:avLst/>
-          </a:prstGeom>
-          <a:noFill/>
-        </p:spPr>
-        <p:txBody>
-          <a:bodyPr wrap="square" lIns="0" rIns="0" tIns="0" bIns="0">
-            <a:spAutoFit/>
-          </a:bodyPr>
-          <a:lstStyle/>
-          <a:p>
-            <a:pPr algn="l">
-              <a:lnSpc>
-                <a:spcPct val="100000"/>
-              </a:lnSpc>
-              <a:spcAft>
-                <a:spcPts val="0"/>
-              </a:spcAft>
-            </a:pPr>
-            <a:r>
-              <a:rPr sz="1700" b="0">
-                <a:solidFill>
-                  <a:srgbClr val="1E293B"/>
-                </a:solidFill>
-                <a:latin typeface="Arial"/>
-              </a:rPr>
-              <a:t>+5,000</a:t>
-            </a:r>
-          </a:p>
-        </p:txBody>
-      </p:sp>
-      <p:sp>
-        <p:nvSpPr>
-          <p:cNvPr id="69" name="TextBox 68"/>
-          <p:cNvSpPr txBox="1"/>
-          <p:nvPr/>
-        </p:nvSpPr>
-        <p:spPr>
-          <a:xfrm>
-            <a:off x="37219737" y="17905984"/>
-            <a:ext cx="4242816" cy="365760"/>
-          </a:xfrm>
-          <a:prstGeom prst="rect">
-            <a:avLst/>
-          </a:prstGeom>
-          <a:noFill/>
-        </p:spPr>
-        <p:txBody>
-          <a:bodyPr wrap="square" lIns="0" rIns="0" tIns="0" bIns="0">
-            <a:spAutoFit/>
-          </a:bodyPr>
-          <a:lstStyle/>
-          <a:p>
-            <a:pPr algn="r">
-              <a:lnSpc>
-                <a:spcPct val="100000"/>
-              </a:lnSpc>
-              <a:spcAft>
-                <a:spcPts val="0"/>
-              </a:spcAft>
-            </a:pPr>
-            <a:r>
-              <a:rPr sz="1700" b="0">
-                <a:solidFill>
-                  <a:srgbClr val="1E293B"/>
-                </a:solidFill>
-                <a:latin typeface="Arial"/>
-              </a:rPr>
-              <a:t>0.8609 ± 0.0036</a:t>
-            </a:r>
-          </a:p>
-        </p:txBody>
-      </p:sp>
-      <p:sp>
-        <p:nvSpPr>
-          <p:cNvPr id="70" name="TextBox 69"/>
-          <p:cNvSpPr txBox="1"/>
-          <p:nvPr/>
-        </p:nvSpPr>
-        <p:spPr>
-          <a:xfrm>
-            <a:off x="41462553" y="17905984"/>
-            <a:ext cx="1697126" cy="365760"/>
-          </a:xfrm>
-          <a:prstGeom prst="rect">
-            <a:avLst/>
-          </a:prstGeom>
-          <a:noFill/>
-        </p:spPr>
-        <p:txBody>
-          <a:bodyPr wrap="square" lIns="0" rIns="0" tIns="0" bIns="0">
-            <a:spAutoFit/>
-          </a:bodyPr>
-          <a:lstStyle/>
-          <a:p>
-            <a:pPr algn="r">
-              <a:lnSpc>
-                <a:spcPct val="100000"/>
-              </a:lnSpc>
-              <a:spcAft>
-                <a:spcPts val="0"/>
-              </a:spcAft>
-            </a:pPr>
-            <a:r>
-              <a:rPr sz="1700" b="0">
-                <a:solidFill>
-                  <a:srgbClr val="1E293B"/>
-                </a:solidFill>
-                <a:latin typeface="Arial"/>
-              </a:rPr>
-              <a:t>3</a:t>
-            </a:r>
-          </a:p>
-        </p:txBody>
-      </p:sp>
-      <p:sp>
-        <p:nvSpPr>
-          <p:cNvPr id="71" name="TextBox 70"/>
-          <p:cNvSpPr txBox="1"/>
-          <p:nvPr/>
-        </p:nvSpPr>
-        <p:spPr>
-          <a:xfrm>
-            <a:off x="32552640" y="18308320"/>
-            <a:ext cx="4667097" cy="365760"/>
-          </a:xfrm>
-          <a:prstGeom prst="rect">
-            <a:avLst/>
-          </a:prstGeom>
-          <a:noFill/>
-        </p:spPr>
-        <p:txBody>
-          <a:bodyPr wrap="square" lIns="0" rIns="0" tIns="0" bIns="0">
-            <a:spAutoFit/>
-          </a:bodyPr>
-          <a:lstStyle/>
-          <a:p>
-            <a:pPr algn="l">
-              <a:lnSpc>
-                <a:spcPct val="100000"/>
-              </a:lnSpc>
-              <a:spcAft>
-                <a:spcPts val="0"/>
-              </a:spcAft>
-            </a:pPr>
-            <a:r>
-              <a:rPr sz="1700" b="0">
-                <a:solidFill>
-                  <a:srgbClr val="1E293B"/>
-                </a:solidFill>
-                <a:latin typeface="Arial"/>
-              </a:rPr>
-              <a:t>+15,000</a:t>
-            </a:r>
-          </a:p>
-        </p:txBody>
-      </p:sp>
-      <p:sp>
-        <p:nvSpPr>
-          <p:cNvPr id="72" name="TextBox 71"/>
-          <p:cNvSpPr txBox="1"/>
-          <p:nvPr/>
-        </p:nvSpPr>
-        <p:spPr>
-          <a:xfrm>
-            <a:off x="37219737" y="18308320"/>
-            <a:ext cx="4242816" cy="365760"/>
-          </a:xfrm>
-          <a:prstGeom prst="rect">
-            <a:avLst/>
-          </a:prstGeom>
-          <a:noFill/>
-        </p:spPr>
-        <p:txBody>
-          <a:bodyPr wrap="square" lIns="0" rIns="0" tIns="0" bIns="0">
-            <a:spAutoFit/>
-          </a:bodyPr>
-          <a:lstStyle/>
-          <a:p>
-            <a:pPr algn="r">
-              <a:lnSpc>
-                <a:spcPct val="100000"/>
-              </a:lnSpc>
-              <a:spcAft>
-                <a:spcPts val="0"/>
-              </a:spcAft>
-            </a:pPr>
-            <a:r>
-              <a:rPr sz="1700" b="0">
-                <a:solidFill>
-                  <a:srgbClr val="1E293B"/>
-                </a:solidFill>
-                <a:latin typeface="Arial"/>
-              </a:rPr>
-              <a:t>0.8580 ± 0.0047</a:t>
-            </a:r>
-          </a:p>
-        </p:txBody>
-      </p:sp>
-      <p:sp>
-        <p:nvSpPr>
-          <p:cNvPr id="73" name="TextBox 72"/>
-          <p:cNvSpPr txBox="1"/>
-          <p:nvPr/>
-        </p:nvSpPr>
-        <p:spPr>
-          <a:xfrm>
-            <a:off x="41462553" y="18308320"/>
-            <a:ext cx="1697126" cy="365760"/>
-          </a:xfrm>
-          <a:prstGeom prst="rect">
-            <a:avLst/>
-          </a:prstGeom>
-          <a:noFill/>
-        </p:spPr>
-        <p:txBody>
-          <a:bodyPr wrap="square" lIns="0" rIns="0" tIns="0" bIns="0">
-            <a:spAutoFit/>
-          </a:bodyPr>
-          <a:lstStyle/>
-          <a:p>
-            <a:pPr algn="r">
-              <a:lnSpc>
-                <a:spcPct val="100000"/>
-              </a:lnSpc>
-              <a:spcAft>
-                <a:spcPts val="0"/>
-              </a:spcAft>
-            </a:pPr>
-            <a:r>
-              <a:rPr sz="1700" b="0">
-                <a:solidFill>
-                  <a:srgbClr val="1E293B"/>
-                </a:solidFill>
-                <a:latin typeface="Arial"/>
-              </a:rPr>
-              <a:t>3</a:t>
-            </a:r>
-          </a:p>
-        </p:txBody>
-      </p:sp>
-      <p:sp>
-        <p:nvSpPr>
-          <p:cNvPr id="74" name="TextBox 73"/>
-          <p:cNvSpPr txBox="1"/>
-          <p:nvPr/>
-        </p:nvSpPr>
-        <p:spPr>
-          <a:xfrm>
-            <a:off x="32552640" y="18710656"/>
-            <a:ext cx="4667097" cy="365760"/>
-          </a:xfrm>
-          <a:prstGeom prst="rect">
-            <a:avLst/>
-          </a:prstGeom>
-          <a:noFill/>
-        </p:spPr>
-        <p:txBody>
-          <a:bodyPr wrap="square" lIns="0" rIns="0" tIns="0" bIns="0">
-            <a:spAutoFit/>
-          </a:bodyPr>
-          <a:lstStyle/>
-          <a:p>
-            <a:pPr algn="l">
-              <a:lnSpc>
-                <a:spcPct val="100000"/>
-              </a:lnSpc>
-              <a:spcAft>
-                <a:spcPts val="0"/>
-              </a:spcAft>
-            </a:pPr>
-            <a:r>
-              <a:rPr sz="1700" b="1">
-                <a:solidFill>
-                  <a:srgbClr val="1C6FB5"/>
-                </a:solidFill>
-                <a:latin typeface="Arial"/>
-              </a:rPr>
-              <a:t>+40,000</a:t>
-            </a:r>
-          </a:p>
-        </p:txBody>
-      </p:sp>
-      <p:sp>
-        <p:nvSpPr>
-          <p:cNvPr id="75" name="TextBox 74"/>
-          <p:cNvSpPr txBox="1"/>
-          <p:nvPr/>
-        </p:nvSpPr>
-        <p:spPr>
-          <a:xfrm>
-            <a:off x="37219737" y="18710656"/>
-            <a:ext cx="4242816" cy="365760"/>
-          </a:xfrm>
-          <a:prstGeom prst="rect">
-            <a:avLst/>
-          </a:prstGeom>
-          <a:noFill/>
-        </p:spPr>
-        <p:txBody>
-          <a:bodyPr wrap="square" lIns="0" rIns="0" tIns="0" bIns="0">
-            <a:spAutoFit/>
-          </a:bodyPr>
-          <a:lstStyle/>
-          <a:p>
-            <a:pPr algn="r">
-              <a:lnSpc>
-                <a:spcPct val="100000"/>
-              </a:lnSpc>
-              <a:spcAft>
-                <a:spcPts val="0"/>
-              </a:spcAft>
-            </a:pPr>
-            <a:r>
-              <a:rPr sz="1700" b="1">
-                <a:solidFill>
-                  <a:srgbClr val="1C6FB5"/>
-                </a:solidFill>
-                <a:latin typeface="Arial"/>
-              </a:rPr>
-              <a:t>0.8448 ± 0.0018</a:t>
-            </a:r>
-          </a:p>
-        </p:txBody>
-      </p:sp>
-      <p:sp>
-        <p:nvSpPr>
-          <p:cNvPr id="76" name="TextBox 75"/>
-          <p:cNvSpPr txBox="1"/>
-          <p:nvPr/>
-        </p:nvSpPr>
-        <p:spPr>
-          <a:xfrm>
-            <a:off x="41462553" y="18710656"/>
-            <a:ext cx="1697126" cy="365760"/>
-          </a:xfrm>
-          <a:prstGeom prst="rect">
-            <a:avLst/>
-          </a:prstGeom>
-          <a:noFill/>
-        </p:spPr>
-        <p:txBody>
-          <a:bodyPr wrap="square" lIns="0" rIns="0" tIns="0" bIns="0">
-            <a:spAutoFit/>
-          </a:bodyPr>
-          <a:lstStyle/>
-          <a:p>
-            <a:pPr algn="r">
-              <a:lnSpc>
-                <a:spcPct val="100000"/>
-              </a:lnSpc>
-              <a:spcAft>
-                <a:spcPts val="0"/>
-              </a:spcAft>
-            </a:pPr>
-            <a:r>
-              <a:rPr sz="1700" b="1">
-                <a:solidFill>
-                  <a:srgbClr val="1C6FB5"/>
-                </a:solidFill>
-                <a:latin typeface="Arial"/>
-              </a:rPr>
-              <a:t>3</a:t>
-            </a:r>
-          </a:p>
-        </p:txBody>
-      </p:sp>
-      <p:sp>
-        <p:nvSpPr>
-          <p:cNvPr id="77" name="Rectangle 76"/>
+              <a:t>n</a:t>
+            </a:r>
+          </a:p>
+        </p:txBody>
+      </p:sp>
+      <p:sp>
+        <p:nvSpPr>
+          <p:cNvPr id="65" name="Rectangle 64"/>
           <p:cNvSpPr/>
           <p:nvPr/>
         </p:nvSpPr>
         <p:spPr>
           <a:xfrm>
-            <a:off x="32552640" y="19140424"/>
-            <a:ext cx="10607040" cy="23774"/>
+            <a:off x="32552640" y="17382744"/>
+            <a:ext cx="10607040" cy="14630"/>
           </a:xfrm>
           <a:prstGeom prst="rect">
             <a:avLst/>
           </a:prstGeom>
           <a:solidFill>
-            <a:srgbClr val="1E293B"/>
+            <a:srgbClr val="C2CEDA"/>
           </a:solidFill>
           <a:ln>
             <a:noFill/>
@@ -6216,14 +5712,14 @@
       </p:sp>
       <p:sp>
         <p:nvSpPr>
-          <p:cNvPr id="78" name="TextBox 77"/>
+          <p:cNvPr id="66" name="TextBox 65"/>
           <p:cNvSpPr txBox="1"/>
           <p:nvPr/>
         </p:nvSpPr>
         <p:spPr>
           <a:xfrm>
-            <a:off x="32552640" y="19405600"/>
-            <a:ext cx="10607040" cy="365760"/>
+            <a:off x="32552640" y="17492472"/>
+            <a:ext cx="4667097" cy="365760"/>
           </a:xfrm>
           <a:prstGeom prst="rect">
             <a:avLst/>
@@ -6238,82 +5734,502 @@
           <a:p>
             <a:pPr algn="l">
               <a:lnSpc>
-                <a:spcPct val="122000"/>
-              </a:lnSpc>
-              <a:spcAft>
-                <a:spcPts val="1200"/>
-              </a:spcAft>
-            </a:pPr>
-            <a:r>
-              <a:rPr sz="1600" b="0">
-                <a:solidFill>
-                  <a:srgbClr val="556575"/>
-                </a:solidFill>
-                <a:latin typeface="Arial"/>
-              </a:rPr>
-              <a:t>Twelve times the data costs 0.0189, which is 8.2 times the seed spread, and the same eight checkpoints fall on a second weed dataset too. One of six audited web sources clears a 0.90 label-precision bar.</a:t>
-            </a:r>
-          </a:p>
-        </p:txBody>
-      </p:sp>
-      <p:sp>
-        <p:nvSpPr>
-          <p:cNvPr id="79" name="TextBox 78"/>
-          <p:cNvSpPr txBox="1"/>
-          <p:nvPr/>
-        </p:nvSpPr>
-        <p:spPr>
-          <a:xfrm>
-            <a:off x="11704320" y="24223472"/>
-            <a:ext cx="20482560" cy="365760"/>
-          </a:xfrm>
-          <a:prstGeom prst="rect">
-            <a:avLst/>
-          </a:prstGeom>
-          <a:noFill/>
-        </p:spPr>
-        <p:txBody>
-          <a:bodyPr wrap="square" lIns="0" rIns="0" tIns="0" bIns="0">
-            <a:spAutoFit/>
-          </a:bodyPr>
-          <a:lstStyle/>
-          <a:p>
-            <a:pPr algn="l">
-              <a:lnSpc>
-                <a:spcPct val="95000"/>
+                <a:spcPct val="100000"/>
               </a:lnSpc>
               <a:spcAft>
                 <a:spcPts val="0"/>
               </a:spcAft>
             </a:pPr>
             <a:r>
-              <a:rPr sz="3400" b="1">
-                <a:solidFill>
-                  <a:srgbClr val="14314E"/>
+              <a:rPr sz="1700" b="0">
+                <a:solidFill>
+                  <a:srgbClr val="1E293B"/>
                 </a:solidFill>
                 <a:latin typeface="Arial"/>
               </a:rPr>
-              <a:t>Everything we trained, ran, or rejected</a:t>
-            </a:r>
-          </a:p>
-        </p:txBody>
-      </p:sp>
-      <p:sp>
-        <p:nvSpPr>
-          <p:cNvPr id="80" name="Rectangle 79"/>
+              <a:t>none, the core</a:t>
+            </a:r>
+          </a:p>
+        </p:txBody>
+      </p:sp>
+      <p:sp>
+        <p:nvSpPr>
+          <p:cNvPr id="67" name="TextBox 66"/>
+          <p:cNvSpPr txBox="1"/>
+          <p:nvPr/>
+        </p:nvSpPr>
+        <p:spPr>
+          <a:xfrm>
+            <a:off x="37219737" y="17492472"/>
+            <a:ext cx="4242816" cy="365760"/>
+          </a:xfrm>
+          <a:prstGeom prst="rect">
+            <a:avLst/>
+          </a:prstGeom>
+          <a:noFill/>
+        </p:spPr>
+        <p:txBody>
+          <a:bodyPr wrap="square" lIns="0" rIns="0" tIns="0" bIns="0">
+            <a:spAutoFit/>
+          </a:bodyPr>
+          <a:lstStyle/>
+          <a:p>
+            <a:pPr algn="r">
+              <a:lnSpc>
+                <a:spcPct val="100000"/>
+              </a:lnSpc>
+              <a:spcAft>
+                <a:spcPts val="0"/>
+              </a:spcAft>
+            </a:pPr>
+            <a:r>
+              <a:rPr sz="1700" b="0">
+                <a:solidFill>
+                  <a:srgbClr val="1E293B"/>
+                </a:solidFill>
+                <a:latin typeface="Arial"/>
+              </a:rPr>
+              <a:t>0.8637 ± 0.0027</a:t>
+            </a:r>
+          </a:p>
+        </p:txBody>
+      </p:sp>
+      <p:sp>
+        <p:nvSpPr>
+          <p:cNvPr id="68" name="TextBox 67"/>
+          <p:cNvSpPr txBox="1"/>
+          <p:nvPr/>
+        </p:nvSpPr>
+        <p:spPr>
+          <a:xfrm>
+            <a:off x="41462553" y="17492472"/>
+            <a:ext cx="1697126" cy="365760"/>
+          </a:xfrm>
+          <a:prstGeom prst="rect">
+            <a:avLst/>
+          </a:prstGeom>
+          <a:noFill/>
+        </p:spPr>
+        <p:txBody>
+          <a:bodyPr wrap="square" lIns="0" rIns="0" tIns="0" bIns="0">
+            <a:spAutoFit/>
+          </a:bodyPr>
+          <a:lstStyle/>
+          <a:p>
+            <a:pPr algn="r">
+              <a:lnSpc>
+                <a:spcPct val="100000"/>
+              </a:lnSpc>
+              <a:spcAft>
+                <a:spcPts val="0"/>
+              </a:spcAft>
+            </a:pPr>
+            <a:r>
+              <a:rPr sz="1700" b="0">
+                <a:solidFill>
+                  <a:srgbClr val="1E293B"/>
+                </a:solidFill>
+                <a:latin typeface="Arial"/>
+              </a:rPr>
+              <a:t>3</a:t>
+            </a:r>
+          </a:p>
+        </p:txBody>
+      </p:sp>
+      <p:sp>
+        <p:nvSpPr>
+          <p:cNvPr id="69" name="TextBox 68"/>
+          <p:cNvSpPr txBox="1"/>
+          <p:nvPr/>
+        </p:nvSpPr>
+        <p:spPr>
+          <a:xfrm>
+            <a:off x="32552640" y="17894808"/>
+            <a:ext cx="4667097" cy="365760"/>
+          </a:xfrm>
+          <a:prstGeom prst="rect">
+            <a:avLst/>
+          </a:prstGeom>
+          <a:noFill/>
+        </p:spPr>
+        <p:txBody>
+          <a:bodyPr wrap="square" lIns="0" rIns="0" tIns="0" bIns="0">
+            <a:spAutoFit/>
+          </a:bodyPr>
+          <a:lstStyle/>
+          <a:p>
+            <a:pPr algn="l">
+              <a:lnSpc>
+                <a:spcPct val="100000"/>
+              </a:lnSpc>
+              <a:spcAft>
+                <a:spcPts val="0"/>
+              </a:spcAft>
+            </a:pPr>
+            <a:r>
+              <a:rPr sz="1700" b="0">
+                <a:solidFill>
+                  <a:srgbClr val="1E293B"/>
+                </a:solidFill>
+                <a:latin typeface="Arial"/>
+              </a:rPr>
+              <a:t>+5,000</a:t>
+            </a:r>
+          </a:p>
+        </p:txBody>
+      </p:sp>
+      <p:sp>
+        <p:nvSpPr>
+          <p:cNvPr id="70" name="TextBox 69"/>
+          <p:cNvSpPr txBox="1"/>
+          <p:nvPr/>
+        </p:nvSpPr>
+        <p:spPr>
+          <a:xfrm>
+            <a:off x="37219737" y="17894808"/>
+            <a:ext cx="4242816" cy="365760"/>
+          </a:xfrm>
+          <a:prstGeom prst="rect">
+            <a:avLst/>
+          </a:prstGeom>
+          <a:noFill/>
+        </p:spPr>
+        <p:txBody>
+          <a:bodyPr wrap="square" lIns="0" rIns="0" tIns="0" bIns="0">
+            <a:spAutoFit/>
+          </a:bodyPr>
+          <a:lstStyle/>
+          <a:p>
+            <a:pPr algn="r">
+              <a:lnSpc>
+                <a:spcPct val="100000"/>
+              </a:lnSpc>
+              <a:spcAft>
+                <a:spcPts val="0"/>
+              </a:spcAft>
+            </a:pPr>
+            <a:r>
+              <a:rPr sz="1700" b="0">
+                <a:solidFill>
+                  <a:srgbClr val="1E293B"/>
+                </a:solidFill>
+                <a:latin typeface="Arial"/>
+              </a:rPr>
+              <a:t>0.8609 ± 0.0036</a:t>
+            </a:r>
+          </a:p>
+        </p:txBody>
+      </p:sp>
+      <p:sp>
+        <p:nvSpPr>
+          <p:cNvPr id="71" name="TextBox 70"/>
+          <p:cNvSpPr txBox="1"/>
+          <p:nvPr/>
+        </p:nvSpPr>
+        <p:spPr>
+          <a:xfrm>
+            <a:off x="41462553" y="17894808"/>
+            <a:ext cx="1697126" cy="365760"/>
+          </a:xfrm>
+          <a:prstGeom prst="rect">
+            <a:avLst/>
+          </a:prstGeom>
+          <a:noFill/>
+        </p:spPr>
+        <p:txBody>
+          <a:bodyPr wrap="square" lIns="0" rIns="0" tIns="0" bIns="0">
+            <a:spAutoFit/>
+          </a:bodyPr>
+          <a:lstStyle/>
+          <a:p>
+            <a:pPr algn="r">
+              <a:lnSpc>
+                <a:spcPct val="100000"/>
+              </a:lnSpc>
+              <a:spcAft>
+                <a:spcPts val="0"/>
+              </a:spcAft>
+            </a:pPr>
+            <a:r>
+              <a:rPr sz="1700" b="0">
+                <a:solidFill>
+                  <a:srgbClr val="1E293B"/>
+                </a:solidFill>
+                <a:latin typeface="Arial"/>
+              </a:rPr>
+              <a:t>3</a:t>
+            </a:r>
+          </a:p>
+        </p:txBody>
+      </p:sp>
+      <p:sp>
+        <p:nvSpPr>
+          <p:cNvPr id="72" name="TextBox 71"/>
+          <p:cNvSpPr txBox="1"/>
+          <p:nvPr/>
+        </p:nvSpPr>
+        <p:spPr>
+          <a:xfrm>
+            <a:off x="32552640" y="18297144"/>
+            <a:ext cx="4667097" cy="365760"/>
+          </a:xfrm>
+          <a:prstGeom prst="rect">
+            <a:avLst/>
+          </a:prstGeom>
+          <a:noFill/>
+        </p:spPr>
+        <p:txBody>
+          <a:bodyPr wrap="square" lIns="0" rIns="0" tIns="0" bIns="0">
+            <a:spAutoFit/>
+          </a:bodyPr>
+          <a:lstStyle/>
+          <a:p>
+            <a:pPr algn="l">
+              <a:lnSpc>
+                <a:spcPct val="100000"/>
+              </a:lnSpc>
+              <a:spcAft>
+                <a:spcPts val="0"/>
+              </a:spcAft>
+            </a:pPr>
+            <a:r>
+              <a:rPr sz="1700" b="0">
+                <a:solidFill>
+                  <a:srgbClr val="1E293B"/>
+                </a:solidFill>
+                <a:latin typeface="Arial"/>
+              </a:rPr>
+              <a:t>+15,000</a:t>
+            </a:r>
+          </a:p>
+        </p:txBody>
+      </p:sp>
+      <p:sp>
+        <p:nvSpPr>
+          <p:cNvPr id="73" name="TextBox 72"/>
+          <p:cNvSpPr txBox="1"/>
+          <p:nvPr/>
+        </p:nvSpPr>
+        <p:spPr>
+          <a:xfrm>
+            <a:off x="37219737" y="18297144"/>
+            <a:ext cx="4242816" cy="365760"/>
+          </a:xfrm>
+          <a:prstGeom prst="rect">
+            <a:avLst/>
+          </a:prstGeom>
+          <a:noFill/>
+        </p:spPr>
+        <p:txBody>
+          <a:bodyPr wrap="square" lIns="0" rIns="0" tIns="0" bIns="0">
+            <a:spAutoFit/>
+          </a:bodyPr>
+          <a:lstStyle/>
+          <a:p>
+            <a:pPr algn="r">
+              <a:lnSpc>
+                <a:spcPct val="100000"/>
+              </a:lnSpc>
+              <a:spcAft>
+                <a:spcPts val="0"/>
+              </a:spcAft>
+            </a:pPr>
+            <a:r>
+              <a:rPr sz="1700" b="0">
+                <a:solidFill>
+                  <a:srgbClr val="1E293B"/>
+                </a:solidFill>
+                <a:latin typeface="Arial"/>
+              </a:rPr>
+              <a:t>0.8580 ± 0.0047</a:t>
+            </a:r>
+          </a:p>
+        </p:txBody>
+      </p:sp>
+      <p:sp>
+        <p:nvSpPr>
+          <p:cNvPr id="74" name="TextBox 73"/>
+          <p:cNvSpPr txBox="1"/>
+          <p:nvPr/>
+        </p:nvSpPr>
+        <p:spPr>
+          <a:xfrm>
+            <a:off x="41462553" y="18297144"/>
+            <a:ext cx="1697126" cy="365760"/>
+          </a:xfrm>
+          <a:prstGeom prst="rect">
+            <a:avLst/>
+          </a:prstGeom>
+          <a:noFill/>
+        </p:spPr>
+        <p:txBody>
+          <a:bodyPr wrap="square" lIns="0" rIns="0" tIns="0" bIns="0">
+            <a:spAutoFit/>
+          </a:bodyPr>
+          <a:lstStyle/>
+          <a:p>
+            <a:pPr algn="r">
+              <a:lnSpc>
+                <a:spcPct val="100000"/>
+              </a:lnSpc>
+              <a:spcAft>
+                <a:spcPts val="0"/>
+              </a:spcAft>
+            </a:pPr>
+            <a:r>
+              <a:rPr sz="1700" b="0">
+                <a:solidFill>
+                  <a:srgbClr val="1E293B"/>
+                </a:solidFill>
+                <a:latin typeface="Arial"/>
+              </a:rPr>
+              <a:t>3</a:t>
+            </a:r>
+          </a:p>
+        </p:txBody>
+      </p:sp>
+      <p:sp>
+        <p:nvSpPr>
+          <p:cNvPr id="75" name="TextBox 74"/>
+          <p:cNvSpPr txBox="1"/>
+          <p:nvPr/>
+        </p:nvSpPr>
+        <p:spPr>
+          <a:xfrm>
+            <a:off x="32552640" y="18699480"/>
+            <a:ext cx="4667097" cy="365760"/>
+          </a:xfrm>
+          <a:prstGeom prst="rect">
+            <a:avLst/>
+          </a:prstGeom>
+          <a:noFill/>
+        </p:spPr>
+        <p:txBody>
+          <a:bodyPr wrap="square" lIns="0" rIns="0" tIns="0" bIns="0">
+            <a:spAutoFit/>
+          </a:bodyPr>
+          <a:lstStyle/>
+          <a:p>
+            <a:pPr algn="l">
+              <a:lnSpc>
+                <a:spcPct val="100000"/>
+              </a:lnSpc>
+              <a:spcAft>
+                <a:spcPts val="0"/>
+              </a:spcAft>
+            </a:pPr>
+            <a:r>
+              <a:rPr sz="1700" b="1">
+                <a:solidFill>
+                  <a:srgbClr val="1C6FB5"/>
+                </a:solidFill>
+                <a:latin typeface="Arial"/>
+              </a:rPr>
+              <a:t>+40,000</a:t>
+            </a:r>
+          </a:p>
+        </p:txBody>
+      </p:sp>
+      <p:sp>
+        <p:nvSpPr>
+          <p:cNvPr id="76" name="TextBox 75"/>
+          <p:cNvSpPr txBox="1"/>
+          <p:nvPr/>
+        </p:nvSpPr>
+        <p:spPr>
+          <a:xfrm>
+            <a:off x="37219737" y="18699480"/>
+            <a:ext cx="4242816" cy="365760"/>
+          </a:xfrm>
+          <a:prstGeom prst="rect">
+            <a:avLst/>
+          </a:prstGeom>
+          <a:noFill/>
+        </p:spPr>
+        <p:txBody>
+          <a:bodyPr wrap="square" lIns="0" rIns="0" tIns="0" bIns="0">
+            <a:spAutoFit/>
+          </a:bodyPr>
+          <a:lstStyle/>
+          <a:p>
+            <a:pPr algn="r">
+              <a:lnSpc>
+                <a:spcPct val="100000"/>
+              </a:lnSpc>
+              <a:spcAft>
+                <a:spcPts val="0"/>
+              </a:spcAft>
+            </a:pPr>
+            <a:r>
+              <a:rPr sz="1700" b="1">
+                <a:solidFill>
+                  <a:srgbClr val="1C6FB5"/>
+                </a:solidFill>
+                <a:latin typeface="Arial"/>
+              </a:rPr>
+              <a:t>0.8448 ± 0.0018</a:t>
+            </a:r>
+          </a:p>
+        </p:txBody>
+      </p:sp>
+      <p:sp>
+        <p:nvSpPr>
+          <p:cNvPr id="77" name="TextBox 76"/>
+          <p:cNvSpPr txBox="1"/>
+          <p:nvPr/>
+        </p:nvSpPr>
+        <p:spPr>
+          <a:xfrm>
+            <a:off x="41462553" y="18699480"/>
+            <a:ext cx="1697126" cy="365760"/>
+          </a:xfrm>
+          <a:prstGeom prst="rect">
+            <a:avLst/>
+          </a:prstGeom>
+          <a:noFill/>
+        </p:spPr>
+        <p:txBody>
+          <a:bodyPr wrap="square" lIns="0" rIns="0" tIns="0" bIns="0">
+            <a:spAutoFit/>
+          </a:bodyPr>
+          <a:lstStyle/>
+          <a:p>
+            <a:pPr algn="r">
+              <a:lnSpc>
+                <a:spcPct val="100000"/>
+              </a:lnSpc>
+              <a:spcAft>
+                <a:spcPts val="0"/>
+              </a:spcAft>
+            </a:pPr>
+            <a:r>
+              <a:rPr sz="1700" b="1">
+                <a:solidFill>
+                  <a:srgbClr val="1C6FB5"/>
+                </a:solidFill>
+                <a:latin typeface="Arial"/>
+              </a:rPr>
+              <a:t>3</a:t>
+            </a:r>
+          </a:p>
+        </p:txBody>
+      </p:sp>
+      <p:sp>
+        <p:nvSpPr>
+          <p:cNvPr id="78" name="Rectangle 77"/>
           <p:cNvSpPr/>
           <p:nvPr/>
         </p:nvSpPr>
         <p:spPr>
           <a:xfrm>
-            <a:off x="11704320" y="24790400"/>
-            <a:ext cx="20482560" cy="27432"/>
+            <a:off x="32552640" y="19129248"/>
+            <a:ext cx="10607040" cy="23774"/>
           </a:xfrm>
           <a:prstGeom prst="rect">
             <a:avLst/>
           </a:prstGeom>
           <a:solidFill>
-            <a:srgbClr val="1C6FB5"/>
+            <a:srgbClr val="1E293B"/>
           </a:solidFill>
           <a:ln>
             <a:noFill/>
@@ -6342,40 +6258,16 @@
           </a:p>
         </p:txBody>
       </p:sp>
-      <p:pic>
-        <p:nvPicPr>
-          <p:cNvPr id="81" name="Picture 80" descr="m_ledger.png"/>
-          <p:cNvPicPr>
-            <a:picLocks noChangeAspect="1"/>
-          </p:cNvPicPr>
-          <p:nvPr/>
-        </p:nvPicPr>
-        <p:blipFill>
-          <a:blip r:embed="rId7"/>
-          <a:stretch>
-            <a:fillRect/>
-          </a:stretch>
-        </p:blipFill>
-        <p:spPr>
-          <a:xfrm>
-            <a:off x="11704320" y="25119584"/>
-            <a:ext cx="20482560" cy="3749040"/>
-          </a:xfrm>
-          <a:prstGeom prst="rect">
-            <a:avLst/>
-          </a:prstGeom>
-        </p:spPr>
-      </p:pic>
-      <p:sp>
-        <p:nvSpPr>
-          <p:cNvPr id="82" name="TextBox 81"/>
+      <p:sp>
+        <p:nvSpPr>
+          <p:cNvPr id="79" name="TextBox 78"/>
           <p:cNvSpPr txBox="1"/>
           <p:nvPr/>
         </p:nvSpPr>
         <p:spPr>
           <a:xfrm>
-            <a:off x="11704320" y="28978351"/>
-            <a:ext cx="20482560" cy="365760"/>
+            <a:off x="32552640" y="19394424"/>
+            <a:ext cx="10607040" cy="365760"/>
           </a:xfrm>
           <a:prstGeom prst="rect">
             <a:avLst/>
@@ -6390,10 +6282,10 @@
           <a:p>
             <a:pPr algn="l">
               <a:lnSpc>
-                <a:spcPct val="118000"/>
+                <a:spcPct val="122000"/>
               </a:lnSpc>
               <a:spcAft>
-                <a:spcPts val="0"/>
+                <a:spcPts val="1200"/>
               </a:spcAft>
             </a:pPr>
             <a:r>
@@ -6403,21 +6295,21 @@
                 </a:solidFill>
                 <a:latin typeface="Arial"/>
               </a:rPr>
-              <a:t>Figure 6.  30 rows in four families, which is 27 distinct models: OWLv2-large and Qwen2.5-7B each appear twice because each does two jobs here. One model is deployed. The zero-shot column is a single deterministic pass per model with no repeats, scored as mAP50 on the 848-image split; the reviewer column is the 149-case dev split, and two of its arms are still running. RF-DETR's score is on a third scale and is never differenced against the rows above it: the one measured offset between two of our evaluators, 0.0239, is larger than the gap on display.</a:t>
-            </a:r>
-          </a:p>
-        </p:txBody>
-      </p:sp>
-      <p:sp>
-        <p:nvSpPr>
-          <p:cNvPr id="83" name="TextBox 82"/>
+              <a:t>Twelve times the data costs 0.0189, which is 8.2 times the seed spread, and the same eight checkpoints fall on a second weed dataset too. One of six audited web sources clears a 0.90 label-precision bar.</a:t>
+            </a:r>
+          </a:p>
+        </p:txBody>
+      </p:sp>
+      <p:sp>
+        <p:nvSpPr>
+          <p:cNvPr id="80" name="TextBox 79"/>
           <p:cNvSpPr txBox="1"/>
           <p:nvPr/>
         </p:nvSpPr>
         <p:spPr>
           <a:xfrm>
-            <a:off x="731520" y="24223472"/>
-            <a:ext cx="10607040" cy="365760"/>
+            <a:off x="11704320" y="24212296"/>
+            <a:ext cx="20482560" cy="365760"/>
           </a:xfrm>
           <a:prstGeom prst="rect">
             <a:avLst/>
@@ -6445,21 +6337,21 @@
                 </a:solidFill>
                 <a:latin typeface="Arial"/>
               </a:rPr>
-              <a:t>Six audited web sources</a:t>
-            </a:r>
-          </a:p>
-        </p:txBody>
-      </p:sp>
-      <p:sp>
-        <p:nvSpPr>
-          <p:cNvPr id="84" name="Rectangle 83"/>
+              <a:t>Everything we trained, ran, or rejected</a:t>
+            </a:r>
+          </a:p>
+        </p:txBody>
+      </p:sp>
+      <p:sp>
+        <p:nvSpPr>
+          <p:cNvPr id="81" name="Rectangle 80"/>
           <p:cNvSpPr/>
           <p:nvPr/>
         </p:nvSpPr>
         <p:spPr>
           <a:xfrm>
-            <a:off x="731520" y="24790400"/>
-            <a:ext cx="10607040" cy="27432"/>
+            <a:off x="11704320" y="24773636"/>
+            <a:ext cx="20482560" cy="27432"/>
           </a:xfrm>
           <a:prstGeom prst="rect">
             <a:avLst/>
@@ -6496,22 +6388,22 @@
       </p:sp>
       <p:pic>
         <p:nvPicPr>
-          <p:cNvPr id="85" name="Picture 84" descr="s_sources.png"/>
+          <p:cNvPr id="82" name="Picture 81" descr="m_ledger.png"/>
           <p:cNvPicPr>
             <a:picLocks noChangeAspect="1"/>
           </p:cNvPicPr>
           <p:nvPr/>
         </p:nvPicPr>
         <p:blipFill>
-          <a:blip r:embed="rId8"/>
+          <a:blip r:embed="rId7"/>
           <a:stretch>
             <a:fillRect/>
           </a:stretch>
         </p:blipFill>
         <p:spPr>
           <a:xfrm>
-            <a:off x="731520" y="25119584"/>
-            <a:ext cx="10607040" cy="3931920"/>
+            <a:off x="11704320" y="25102819"/>
+            <a:ext cx="20482560" cy="3749040"/>
           </a:xfrm>
           <a:prstGeom prst="rect">
             <a:avLst/>
@@ -6520,14 +6412,14 @@
       </p:pic>
       <p:sp>
         <p:nvSpPr>
-          <p:cNvPr id="86" name="TextBox 85"/>
+          <p:cNvPr id="83" name="TextBox 82"/>
           <p:cNvSpPr txBox="1"/>
           <p:nvPr/>
         </p:nvSpPr>
         <p:spPr>
           <a:xfrm>
-            <a:off x="731520" y="29161232"/>
-            <a:ext cx="10607040" cy="365760"/>
+            <a:off x="11704320" y="28961588"/>
+            <a:ext cx="20482560" cy="365760"/>
           </a:xfrm>
           <a:prstGeom prst="rect">
             <a:avLst/>
@@ -6555,20 +6447,20 @@
                 </a:solidFill>
                 <a:latin typeface="Arial"/>
               </a:rPr>
-              <a:t>Figure 7.  The six audited harvested sources. The same probe reads 1.000 on human-labelled CottonWeedDet12, so a source at 0.184 is the data and not the instrument. Only the source at the top clears the bar, and it supplies 3,208 of the 13,527 audited images.</a:t>
-            </a:r>
-          </a:p>
-        </p:txBody>
-      </p:sp>
-      <p:sp>
-        <p:nvSpPr>
-          <p:cNvPr id="87" name="TextBox 86"/>
+              <a:t>Figure 6.  30 rows in four families, which is 27 distinct models: OWLv2-large and Qwen2.5-7B each appear twice because each does two jobs here. One model is deployed. The zero-shot column is a single deterministic pass per model with no repeats, scored as mAP50 on the 848-image split; the reviewer column is the 149-case dev split, and two of its arms are still running. RF-DETR's score is on a third scale and is never differenced against the rows above it: the one measured offset between two of our evaluators, 0.0239, is larger than the gap on display.</a:t>
+            </a:r>
+          </a:p>
+        </p:txBody>
+      </p:sp>
+      <p:sp>
+        <p:nvSpPr>
+          <p:cNvPr id="84" name="TextBox 83"/>
           <p:cNvSpPr txBox="1"/>
           <p:nvPr/>
         </p:nvSpPr>
         <p:spPr>
           <a:xfrm>
-            <a:off x="32552640" y="24223472"/>
+            <a:off x="731520" y="24212296"/>
             <a:ext cx="10607040" cy="365760"/>
           </a:xfrm>
           <a:prstGeom prst="rect">
@@ -6597,20 +6489,20 @@
                 </a:solidFill>
                 <a:latin typeface="Arial"/>
               </a:rPr>
-              <a:t>Back on our own rows</a:t>
-            </a:r>
-          </a:p>
-        </p:txBody>
-      </p:sp>
-      <p:sp>
-        <p:nvSpPr>
-          <p:cNvPr id="88" name="Rectangle 87"/>
+              <a:t>Six audited web sources</a:t>
+            </a:r>
+          </a:p>
+        </p:txBody>
+      </p:sp>
+      <p:sp>
+        <p:nvSpPr>
+          <p:cNvPr id="85" name="Rectangle 84"/>
           <p:cNvSpPr/>
           <p:nvPr/>
         </p:nvSpPr>
         <p:spPr>
           <a:xfrm>
-            <a:off x="32552640" y="24790400"/>
+            <a:off x="731520" y="24773636"/>
             <a:ext cx="10607040" cy="27432"/>
           </a:xfrm>
           <a:prstGeom prst="rect">
@@ -6648,22 +6540,22 @@
       </p:sp>
       <p:pic>
         <p:nvPicPr>
-          <p:cNvPr id="89" name="Picture 88" descr="p_field.png"/>
+          <p:cNvPr id="86" name="Picture 85" descr="s_sources.png"/>
           <p:cNvPicPr>
             <a:picLocks noChangeAspect="1"/>
           </p:cNvPicPr>
           <p:nvPr/>
         </p:nvPicPr>
         <p:blipFill>
-          <a:blip r:embed="rId9"/>
+          <a:blip r:embed="rId8"/>
           <a:stretch>
             <a:fillRect/>
           </a:stretch>
         </p:blipFill>
         <p:spPr>
           <a:xfrm>
-            <a:off x="32552640" y="25119584"/>
-            <a:ext cx="10607040" cy="2468880"/>
+            <a:off x="731520" y="25102819"/>
+            <a:ext cx="10607040" cy="3931920"/>
           </a:xfrm>
           <a:prstGeom prst="rect">
             <a:avLst/>
@@ -6672,13 +6564,13 @@
       </p:pic>
       <p:sp>
         <p:nvSpPr>
-          <p:cNvPr id="90" name="TextBox 89"/>
+          <p:cNvPr id="87" name="TextBox 86"/>
           <p:cNvSpPr txBox="1"/>
           <p:nvPr/>
         </p:nvSpPr>
         <p:spPr>
           <a:xfrm>
-            <a:off x="32552640" y="27698192"/>
+            <a:off x="731520" y="29144468"/>
             <a:ext cx="10607040" cy="365760"/>
           </a:xfrm>
           <a:prstGeom prst="rect">
@@ -6707,27 +6599,69 @@
                 </a:solidFill>
                 <a:latin typeface="Arial"/>
               </a:rPr>
-              <a:t>Figure 8.  The deployable checkpoint over every frame the two robots recorded, at the confidence the cart deploys at. There is no ground truth for these frames, so this is the rate at which the detector produces a box at all -- not recall and not precision. Vegetation is excess green over a thumbnail, so "nothing to detect" does not account for it: 1157 frames clear that bar and 21 of them draw a box. 24 of the 25 boxes it does draw are the same class.</a:t>
-            </a:r>
-          </a:p>
-        </p:txBody>
-      </p:sp>
-      <p:sp>
-        <p:nvSpPr>
-          <p:cNvPr id="91" name="Rectangle 90"/>
+              <a:t>Figure 7.  The six audited harvested sources. The same probe reads 1.000 on human-labelled CottonWeedDet12, so a source at 0.184 is the data and not the instrument. Only the source at the top clears the bar, and it supplies 3,208 of the 13,527 audited images.</a:t>
+            </a:r>
+          </a:p>
+        </p:txBody>
+      </p:sp>
+      <p:sp>
+        <p:nvSpPr>
+          <p:cNvPr id="88" name="TextBox 87"/>
+          <p:cNvSpPr txBox="1"/>
+          <p:nvPr/>
+        </p:nvSpPr>
+        <p:spPr>
+          <a:xfrm>
+            <a:off x="32552640" y="24212296"/>
+            <a:ext cx="10607040" cy="365760"/>
+          </a:xfrm>
+          <a:prstGeom prst="rect">
+            <a:avLst/>
+          </a:prstGeom>
+          <a:noFill/>
+        </p:spPr>
+        <p:txBody>
+          <a:bodyPr wrap="square" lIns="0" rIns="0" tIns="0" bIns="0">
+            <a:spAutoFit/>
+          </a:bodyPr>
+          <a:lstStyle/>
+          <a:p>
+            <a:pPr algn="l">
+              <a:lnSpc>
+                <a:spcPct val="95000"/>
+              </a:lnSpc>
+              <a:spcAft>
+                <a:spcPts val="0"/>
+              </a:spcAft>
+            </a:pPr>
+            <a:r>
+              <a:rPr sz="3400" b="1">
+                <a:solidFill>
+                  <a:srgbClr val="14314E"/>
+                </a:solidFill>
+                <a:latin typeface="Arial"/>
+              </a:rPr>
+              <a:t>Back on our own rows</a:t>
+            </a:r>
+          </a:p>
+        </p:txBody>
+      </p:sp>
+      <p:sp>
+        <p:nvSpPr>
+          <p:cNvPr id="89" name="Rectangle 88"/>
           <p:cNvSpPr/>
           <p:nvPr/>
         </p:nvSpPr>
         <p:spPr>
           <a:xfrm>
-            <a:off x="731520" y="30438344"/>
-            <a:ext cx="42428160" cy="20116"/>
+            <a:off x="32552640" y="24773636"/>
+            <a:ext cx="10607040" cy="27432"/>
           </a:xfrm>
           <a:prstGeom prst="rect">
             <a:avLst/>
           </a:prstGeom>
           <a:solidFill>
-            <a:srgbClr val="C2CEDA"/>
+            <a:srgbClr val="1C6FB5"/>
           </a:solidFill>
           <a:ln>
             <a:noFill/>
@@ -6756,15 +6690,125 @@
           </a:p>
         </p:txBody>
       </p:sp>
-      <p:sp>
-        <p:nvSpPr>
-          <p:cNvPr id="92" name="TextBox 91"/>
+      <p:pic>
+        <p:nvPicPr>
+          <p:cNvPr id="90" name="Picture 89" descr="p_field.png"/>
+          <p:cNvPicPr>
+            <a:picLocks noChangeAspect="1"/>
+          </p:cNvPicPr>
+          <p:nvPr/>
+        </p:nvPicPr>
+        <p:blipFill>
+          <a:blip r:embed="rId9"/>
+          <a:stretch>
+            <a:fillRect/>
+          </a:stretch>
+        </p:blipFill>
+        <p:spPr>
+          <a:xfrm>
+            <a:off x="32552640" y="25102819"/>
+            <a:ext cx="10607040" cy="2468880"/>
+          </a:xfrm>
+          <a:prstGeom prst="rect">
+            <a:avLst/>
+          </a:prstGeom>
+        </p:spPr>
+      </p:pic>
+      <p:sp>
+        <p:nvSpPr>
+          <p:cNvPr id="91" name="TextBox 90"/>
           <p:cNvSpPr txBox="1"/>
           <p:nvPr/>
         </p:nvSpPr>
         <p:spPr>
           <a:xfrm>
-            <a:off x="731520" y="30694376"/>
+            <a:off x="32552640" y="27681428"/>
+            <a:ext cx="10607040" cy="365760"/>
+          </a:xfrm>
+          <a:prstGeom prst="rect">
+            <a:avLst/>
+          </a:prstGeom>
+          <a:noFill/>
+        </p:spPr>
+        <p:txBody>
+          <a:bodyPr wrap="square" lIns="0" rIns="0" tIns="0" bIns="0">
+            <a:spAutoFit/>
+          </a:bodyPr>
+          <a:lstStyle/>
+          <a:p>
+            <a:pPr algn="l">
+              <a:lnSpc>
+                <a:spcPct val="118000"/>
+              </a:lnSpc>
+              <a:spcAft>
+                <a:spcPts val="0"/>
+              </a:spcAft>
+            </a:pPr>
+            <a:r>
+              <a:rPr sz="1600" b="0">
+                <a:solidFill>
+                  <a:srgbClr val="556575"/>
+                </a:solidFill>
+                <a:latin typeface="Arial"/>
+              </a:rPr>
+              <a:t>Figure 8.  The deployable checkpoint over every frame the two robots recorded, at the confidence the cart deploys at. There is no ground truth for these frames, so this is the rate at which the detector produces a box at all -- not recall and not precision. Vegetation is excess green over a thumbnail, so "nothing to detect" does not account for it: 1157 frames clear that bar and 21 of them draw a box. 24 of the 25 boxes it does draw are the same class.</a:t>
+            </a:r>
+          </a:p>
+        </p:txBody>
+      </p:sp>
+      <p:sp>
+        <p:nvSpPr>
+          <p:cNvPr id="92" name="Rectangle 91"/>
+          <p:cNvSpPr/>
+          <p:nvPr/>
+        </p:nvSpPr>
+        <p:spPr>
+          <a:xfrm>
+            <a:off x="731520" y="30421580"/>
+            <a:ext cx="42428160" cy="20116"/>
+          </a:xfrm>
+          <a:prstGeom prst="rect">
+            <a:avLst/>
+          </a:prstGeom>
+          <a:solidFill>
+            <a:srgbClr val="C2CEDA"/>
+          </a:solidFill>
+          <a:ln>
+            <a:noFill/>
+          </a:ln>
+          <a:effectLst/>
+        </p:spPr>
+        <p:style>
+          <a:lnRef idx="1">
+            <a:schemeClr val="accent1"/>
+          </a:lnRef>
+          <a:fillRef idx="3">
+            <a:schemeClr val="accent1"/>
+          </a:fillRef>
+          <a:effectRef idx="2">
+            <a:schemeClr val="accent1"/>
+          </a:effectRef>
+          <a:fontRef idx="minor">
+            <a:schemeClr val="lt1"/>
+          </a:fontRef>
+        </p:style>
+        <p:txBody>
+          <a:bodyPr rtlCol="0" anchor="ctr"/>
+          <a:lstStyle/>
+          <a:p>
+            <a:pPr algn="ctr"/>
+          </a:p>
+        </p:txBody>
+      </p:sp>
+      <p:sp>
+        <p:nvSpPr>
+          <p:cNvPr id="93" name="TextBox 92"/>
+          <p:cNvSpPr txBox="1"/>
+          <p:nvPr/>
+        </p:nvSpPr>
+        <p:spPr>
+          <a:xfrm>
+            <a:off x="731520" y="30677612"/>
             <a:ext cx="13837920" cy="365760"/>
           </a:xfrm>
           <a:prstGeom prst="rect">
@@ -6800,13 +6844,13 @@
       </p:sp>
       <p:sp>
         <p:nvSpPr>
-          <p:cNvPr id="93" name="TextBox 92"/>
+          <p:cNvPr id="94" name="TextBox 93"/>
           <p:cNvSpPr txBox="1"/>
           <p:nvPr/>
         </p:nvSpPr>
         <p:spPr>
           <a:xfrm>
-            <a:off x="15026640" y="30694376"/>
+            <a:off x="15026640" y="30677612"/>
             <a:ext cx="13837920" cy="365760"/>
           </a:xfrm>
           <a:prstGeom prst="rect">
@@ -6842,13 +6886,13 @@
       </p:sp>
       <p:sp>
         <p:nvSpPr>
-          <p:cNvPr id="94" name="TextBox 93"/>
+          <p:cNvPr id="95" name="TextBox 94"/>
           <p:cNvSpPr txBox="1"/>
           <p:nvPr/>
         </p:nvSpPr>
         <p:spPr>
           <a:xfrm>
-            <a:off x="29321759" y="30694376"/>
+            <a:off x="29321759" y="30677612"/>
             <a:ext cx="13837920" cy="365760"/>
           </a:xfrm>
           <a:prstGeom prst="rect">
